--- a/Thuyet_trinh_Finetune_GLM_OCR_Tieng_Viet.pptx
+++ b/Thuyet_trinh_Finetune_GLM_OCR_Tieng_Viet.pptx
@@ -5,23 +5,23 @@
     <p:sldMasterId id="2147483648" r:id="rId1"/>
   </p:sldMasterIdLst>
   <p:sldIdLst>
-    <p:sldId id="256" r:id="rId2"/>
-    <p:sldId id="257" r:id="rId3"/>
-    <p:sldId id="258" r:id="rId4"/>
-    <p:sldId id="259" r:id="rId5"/>
-    <p:sldId id="260" r:id="rId6"/>
-    <p:sldId id="261" r:id="rId7"/>
-    <p:sldId id="262" r:id="rId8"/>
-    <p:sldId id="263" r:id="rId9"/>
-    <p:sldId id="264" r:id="rId10"/>
-    <p:sldId id="265" r:id="rId11"/>
-    <p:sldId id="266" r:id="rId12"/>
-    <p:sldId id="267" r:id="rId13"/>
-    <p:sldId id="268" r:id="rId14"/>
-    <p:sldId id="269" r:id="rId15"/>
-    <p:sldId id="270" r:id="rId16"/>
+    <p:sldId id="256" r:id="rId7"/>
+    <p:sldId id="257" r:id="rId8"/>
+    <p:sldId id="258" r:id="rId9"/>
+    <p:sldId id="259" r:id="rId10"/>
+    <p:sldId id="260" r:id="rId11"/>
+    <p:sldId id="261" r:id="rId12"/>
+    <p:sldId id="262" r:id="rId13"/>
+    <p:sldId id="263" r:id="rId14"/>
+    <p:sldId id="264" r:id="rId15"/>
+    <p:sldId id="265" r:id="rId16"/>
+    <p:sldId id="266" r:id="rId17"/>
+    <p:sldId id="267" r:id="rId18"/>
+    <p:sldId id="268" r:id="rId19"/>
+    <p:sldId id="269" r:id="rId20"/>
+    <p:sldId id="270" r:id="rId21"/>
   </p:sldIdLst>
-  <p:sldSz cx="12192000" cy="6858000"/>
+  <p:sldSz cx="12191695" cy="6858000" type="screen4x3"/>
   <p:notesSz cx="6858000" cy="9144000"/>
   <p:defaultTextStyle>
     <a:defPPr>
@@ -118,22 +118,6 @@
       </a:defRPr>
     </a:lvl9pPr>
   </p:defaultTextStyle>
-  <p:extLst>
-    <p:ext uri="{EFAFB233-063F-42B5-8137-9DF3F51BA10A}">
-      <p15:sldGuideLst xmlns:p15="http://schemas.microsoft.com/office/powerpoint/2012/main">
-        <p15:guide id="1" orient="horz" pos="2160">
-          <p15:clr>
-            <a:srgbClr val="A4A3A4"/>
-          </p15:clr>
-        </p15:guide>
-        <p15:guide id="2" pos="2880">
-          <p15:clr>
-            <a:srgbClr val="A4A3A4"/>
-          </p15:clr>
-        </p15:guide>
-      </p15:sldGuideLst>
-    </p:ext>
-  </p:extLst>
 </p:presentation>
 </file>
 
@@ -175,9 +159,10 @@
           <a:lstStyle/>
           <a:p>
             <a:r>
-              <a:rPr lang="en-US"/>
+              <a:rPr lang="en-US" smtClean="0"/>
               <a:t>Click to edit Master title style</a:t>
             </a:r>
+            <a:endParaRPr lang="en-US"/>
           </a:p>
         </p:txBody>
       </p:sp>
@@ -293,9 +278,10 @@
           </a:lstStyle>
           <a:p>
             <a:r>
-              <a:rPr lang="en-US"/>
+              <a:rPr lang="en-US" smtClean="0"/>
               <a:t>Click to edit Master subtitle style</a:t>
             </a:r>
+            <a:endParaRPr lang="en-US"/>
           </a:p>
         </p:txBody>
       </p:sp>
@@ -316,7 +302,7 @@
           <a:p>
             <a:fld id="{5BCAD085-E8A6-8845-BD4E-CB4CCA059FC4}" type="datetimeFigureOut">
               <a:rPr lang="en-US" smtClean="0"/>
-              <a:t>5/29/2026</a:t>
+              <a:t>1/27/13</a:t>
             </a:fld>
             <a:endParaRPr lang="en-US"/>
           </a:p>
@@ -410,9 +396,10 @@
           <a:lstStyle/>
           <a:p>
             <a:r>
-              <a:rPr lang="en-US"/>
+              <a:rPr lang="en-US" smtClean="0"/>
               <a:t>Click to edit Master title style</a:t>
             </a:r>
+            <a:endParaRPr lang="en-US"/>
           </a:p>
         </p:txBody>
       </p:sp>
@@ -433,37 +420,38 @@
           <a:p>
             <a:pPr lvl="0"/>
             <a:r>
-              <a:rPr lang="en-US"/>
+              <a:rPr lang="en-US" smtClean="0"/>
               <a:t>Click to edit Master text styles</a:t>
             </a:r>
           </a:p>
           <a:p>
             <a:pPr lvl="1"/>
             <a:r>
-              <a:rPr lang="en-US"/>
+              <a:rPr lang="en-US" smtClean="0"/>
               <a:t>Second level</a:t>
             </a:r>
           </a:p>
           <a:p>
             <a:pPr lvl="2"/>
             <a:r>
-              <a:rPr lang="en-US"/>
+              <a:rPr lang="en-US" smtClean="0"/>
               <a:t>Third level</a:t>
             </a:r>
           </a:p>
           <a:p>
             <a:pPr lvl="3"/>
             <a:r>
-              <a:rPr lang="en-US"/>
+              <a:rPr lang="en-US" smtClean="0"/>
               <a:t>Fourth level</a:t>
             </a:r>
           </a:p>
           <a:p>
             <a:pPr lvl="4"/>
             <a:r>
-              <a:rPr lang="en-US"/>
+              <a:rPr lang="en-US" smtClean="0"/>
               <a:t>Fifth level</a:t>
             </a:r>
+            <a:endParaRPr lang="en-US"/>
           </a:p>
         </p:txBody>
       </p:sp>
@@ -484,7 +472,7 @@
           <a:p>
             <a:fld id="{5BCAD085-E8A6-8845-BD4E-CB4CCA059FC4}" type="datetimeFigureOut">
               <a:rPr lang="en-US" smtClean="0"/>
-              <a:t>5/29/2026</a:t>
+              <a:t>1/27/13</a:t>
             </a:fld>
             <a:endParaRPr lang="en-US"/>
           </a:p>
@@ -583,9 +571,10 @@
           <a:lstStyle/>
           <a:p>
             <a:r>
-              <a:rPr lang="en-US"/>
+              <a:rPr lang="en-US" smtClean="0"/>
               <a:t>Click to edit Master title style</a:t>
             </a:r>
+            <a:endParaRPr lang="en-US"/>
           </a:p>
         </p:txBody>
       </p:sp>
@@ -611,37 +600,38 @@
           <a:p>
             <a:pPr lvl="0"/>
             <a:r>
-              <a:rPr lang="en-US"/>
+              <a:rPr lang="en-US" smtClean="0"/>
               <a:t>Click to edit Master text styles</a:t>
             </a:r>
           </a:p>
           <a:p>
             <a:pPr lvl="1"/>
             <a:r>
-              <a:rPr lang="en-US"/>
+              <a:rPr lang="en-US" smtClean="0"/>
               <a:t>Second level</a:t>
             </a:r>
           </a:p>
           <a:p>
             <a:pPr lvl="2"/>
             <a:r>
-              <a:rPr lang="en-US"/>
+              <a:rPr lang="en-US" smtClean="0"/>
               <a:t>Third level</a:t>
             </a:r>
           </a:p>
           <a:p>
             <a:pPr lvl="3"/>
             <a:r>
-              <a:rPr lang="en-US"/>
+              <a:rPr lang="en-US" smtClean="0"/>
               <a:t>Fourth level</a:t>
             </a:r>
           </a:p>
           <a:p>
             <a:pPr lvl="4"/>
             <a:r>
-              <a:rPr lang="en-US"/>
+              <a:rPr lang="en-US" smtClean="0"/>
               <a:t>Fifth level</a:t>
             </a:r>
+            <a:endParaRPr lang="en-US"/>
           </a:p>
         </p:txBody>
       </p:sp>
@@ -662,7 +652,7 @@
           <a:p>
             <a:fld id="{5BCAD085-E8A6-8845-BD4E-CB4CCA059FC4}" type="datetimeFigureOut">
               <a:rPr lang="en-US" smtClean="0"/>
-              <a:t>5/29/2026</a:t>
+              <a:t>1/27/13</a:t>
             </a:fld>
             <a:endParaRPr lang="en-US"/>
           </a:p>
@@ -756,9 +746,10 @@
           <a:lstStyle/>
           <a:p>
             <a:r>
-              <a:rPr lang="en-US"/>
+              <a:rPr lang="en-US" smtClean="0"/>
               <a:t>Click to edit Master title style</a:t>
             </a:r>
+            <a:endParaRPr lang="en-US"/>
           </a:p>
         </p:txBody>
       </p:sp>
@@ -779,37 +770,38 @@
           <a:p>
             <a:pPr lvl="0"/>
             <a:r>
-              <a:rPr lang="en-US"/>
+              <a:rPr lang="en-US" smtClean="0"/>
               <a:t>Click to edit Master text styles</a:t>
             </a:r>
           </a:p>
           <a:p>
             <a:pPr lvl="1"/>
             <a:r>
-              <a:rPr lang="en-US"/>
+              <a:rPr lang="en-US" smtClean="0"/>
               <a:t>Second level</a:t>
             </a:r>
           </a:p>
           <a:p>
             <a:pPr lvl="2"/>
             <a:r>
-              <a:rPr lang="en-US"/>
+              <a:rPr lang="en-US" smtClean="0"/>
               <a:t>Third level</a:t>
             </a:r>
           </a:p>
           <a:p>
             <a:pPr lvl="3"/>
             <a:r>
-              <a:rPr lang="en-US"/>
+              <a:rPr lang="en-US" smtClean="0"/>
               <a:t>Fourth level</a:t>
             </a:r>
           </a:p>
           <a:p>
             <a:pPr lvl="4"/>
             <a:r>
-              <a:rPr lang="en-US"/>
+              <a:rPr lang="en-US" smtClean="0"/>
               <a:t>Fifth level</a:t>
             </a:r>
+            <a:endParaRPr lang="en-US"/>
           </a:p>
         </p:txBody>
       </p:sp>
@@ -830,7 +822,7 @@
           <a:p>
             <a:fld id="{5BCAD085-E8A6-8845-BD4E-CB4CCA059FC4}" type="datetimeFigureOut">
               <a:rPr lang="en-US" smtClean="0"/>
-              <a:t>5/29/2026</a:t>
+              <a:t>1/27/13</a:t>
             </a:fld>
             <a:endParaRPr lang="en-US"/>
           </a:p>
@@ -933,9 +925,10 @@
           </a:lstStyle>
           <a:p>
             <a:r>
-              <a:rPr lang="en-US"/>
+              <a:rPr lang="en-US" smtClean="0"/>
               <a:t>Click to edit Master title style</a:t>
             </a:r>
+            <a:endParaRPr lang="en-US"/>
           </a:p>
         </p:txBody>
       </p:sp>
@@ -1052,7 +1045,7 @@
           <a:p>
             <a:pPr lvl="0"/>
             <a:r>
-              <a:rPr lang="en-US"/>
+              <a:rPr lang="en-US" smtClean="0"/>
               <a:t>Click to edit Master text styles</a:t>
             </a:r>
           </a:p>
@@ -1075,7 +1068,7 @@
           <a:p>
             <a:fld id="{5BCAD085-E8A6-8845-BD4E-CB4CCA059FC4}" type="datetimeFigureOut">
               <a:rPr lang="en-US" smtClean="0"/>
-              <a:t>5/29/2026</a:t>
+              <a:t>1/27/13</a:t>
             </a:fld>
             <a:endParaRPr lang="en-US"/>
           </a:p>
@@ -1169,9 +1162,10 @@
           <a:lstStyle/>
           <a:p>
             <a:r>
-              <a:rPr lang="en-US"/>
+              <a:rPr lang="en-US" smtClean="0"/>
               <a:t>Click to edit Master title style</a:t>
             </a:r>
+            <a:endParaRPr lang="en-US"/>
           </a:p>
         </p:txBody>
       </p:sp>
@@ -1225,37 +1219,38 @@
           <a:p>
             <a:pPr lvl="0"/>
             <a:r>
-              <a:rPr lang="en-US"/>
+              <a:rPr lang="en-US" smtClean="0"/>
               <a:t>Click to edit Master text styles</a:t>
             </a:r>
           </a:p>
           <a:p>
             <a:pPr lvl="1"/>
             <a:r>
-              <a:rPr lang="en-US"/>
+              <a:rPr lang="en-US" smtClean="0"/>
               <a:t>Second level</a:t>
             </a:r>
           </a:p>
           <a:p>
             <a:pPr lvl="2"/>
             <a:r>
-              <a:rPr lang="en-US"/>
+              <a:rPr lang="en-US" smtClean="0"/>
               <a:t>Third level</a:t>
             </a:r>
           </a:p>
           <a:p>
             <a:pPr lvl="3"/>
             <a:r>
-              <a:rPr lang="en-US"/>
+              <a:rPr lang="en-US" smtClean="0"/>
               <a:t>Fourth level</a:t>
             </a:r>
           </a:p>
           <a:p>
             <a:pPr lvl="4"/>
             <a:r>
-              <a:rPr lang="en-US"/>
+              <a:rPr lang="en-US" smtClean="0"/>
               <a:t>Fifth level</a:t>
             </a:r>
+            <a:endParaRPr lang="en-US"/>
           </a:p>
         </p:txBody>
       </p:sp>
@@ -1309,37 +1304,38 @@
           <a:p>
             <a:pPr lvl="0"/>
             <a:r>
-              <a:rPr lang="en-US"/>
+              <a:rPr lang="en-US" smtClean="0"/>
               <a:t>Click to edit Master text styles</a:t>
             </a:r>
           </a:p>
           <a:p>
             <a:pPr lvl="1"/>
             <a:r>
-              <a:rPr lang="en-US"/>
+              <a:rPr lang="en-US" smtClean="0"/>
               <a:t>Second level</a:t>
             </a:r>
           </a:p>
           <a:p>
             <a:pPr lvl="2"/>
             <a:r>
-              <a:rPr lang="en-US"/>
+              <a:rPr lang="en-US" smtClean="0"/>
               <a:t>Third level</a:t>
             </a:r>
           </a:p>
           <a:p>
             <a:pPr lvl="3"/>
             <a:r>
-              <a:rPr lang="en-US"/>
+              <a:rPr lang="en-US" smtClean="0"/>
               <a:t>Fourth level</a:t>
             </a:r>
           </a:p>
           <a:p>
             <a:pPr lvl="4"/>
             <a:r>
-              <a:rPr lang="en-US"/>
+              <a:rPr lang="en-US" smtClean="0"/>
               <a:t>Fifth level</a:t>
             </a:r>
+            <a:endParaRPr lang="en-US"/>
           </a:p>
         </p:txBody>
       </p:sp>
@@ -1360,7 +1356,7 @@
           <a:p>
             <a:fld id="{5BCAD085-E8A6-8845-BD4E-CB4CCA059FC4}" type="datetimeFigureOut">
               <a:rPr lang="en-US" smtClean="0"/>
-              <a:t>5/29/2026</a:t>
+              <a:t>1/27/13</a:t>
             </a:fld>
             <a:endParaRPr lang="en-US"/>
           </a:p>
@@ -1458,9 +1454,10 @@
           </a:lstStyle>
           <a:p>
             <a:r>
-              <a:rPr lang="en-US"/>
+              <a:rPr lang="en-US" smtClean="0"/>
               <a:t>Click to edit Master title style</a:t>
             </a:r>
+            <a:endParaRPr lang="en-US"/>
           </a:p>
         </p:txBody>
       </p:sp>
@@ -1523,7 +1520,7 @@
           <a:p>
             <a:pPr lvl="0"/>
             <a:r>
-              <a:rPr lang="en-US"/>
+              <a:rPr lang="en-US" smtClean="0"/>
               <a:t>Click to edit Master text styles</a:t>
             </a:r>
           </a:p>
@@ -1579,37 +1576,38 @@
           <a:p>
             <a:pPr lvl="0"/>
             <a:r>
-              <a:rPr lang="en-US"/>
+              <a:rPr lang="en-US" smtClean="0"/>
               <a:t>Click to edit Master text styles</a:t>
             </a:r>
           </a:p>
           <a:p>
             <a:pPr lvl="1"/>
             <a:r>
-              <a:rPr lang="en-US"/>
+              <a:rPr lang="en-US" smtClean="0"/>
               <a:t>Second level</a:t>
             </a:r>
           </a:p>
           <a:p>
             <a:pPr lvl="2"/>
             <a:r>
-              <a:rPr lang="en-US"/>
+              <a:rPr lang="en-US" smtClean="0"/>
               <a:t>Third level</a:t>
             </a:r>
           </a:p>
           <a:p>
             <a:pPr lvl="3"/>
             <a:r>
-              <a:rPr lang="en-US"/>
+              <a:rPr lang="en-US" smtClean="0"/>
               <a:t>Fourth level</a:t>
             </a:r>
           </a:p>
           <a:p>
             <a:pPr lvl="4"/>
             <a:r>
-              <a:rPr lang="en-US"/>
+              <a:rPr lang="en-US" smtClean="0"/>
               <a:t>Fifth level</a:t>
             </a:r>
+            <a:endParaRPr lang="en-US"/>
           </a:p>
         </p:txBody>
       </p:sp>
@@ -1672,7 +1670,7 @@
           <a:p>
             <a:pPr lvl="0"/>
             <a:r>
-              <a:rPr lang="en-US"/>
+              <a:rPr lang="en-US" smtClean="0"/>
               <a:t>Click to edit Master text styles</a:t>
             </a:r>
           </a:p>
@@ -1728,37 +1726,38 @@
           <a:p>
             <a:pPr lvl="0"/>
             <a:r>
-              <a:rPr lang="en-US"/>
+              <a:rPr lang="en-US" smtClean="0"/>
               <a:t>Click to edit Master text styles</a:t>
             </a:r>
           </a:p>
           <a:p>
             <a:pPr lvl="1"/>
             <a:r>
-              <a:rPr lang="en-US"/>
+              <a:rPr lang="en-US" smtClean="0"/>
               <a:t>Second level</a:t>
             </a:r>
           </a:p>
           <a:p>
             <a:pPr lvl="2"/>
             <a:r>
-              <a:rPr lang="en-US"/>
+              <a:rPr lang="en-US" smtClean="0"/>
               <a:t>Third level</a:t>
             </a:r>
           </a:p>
           <a:p>
             <a:pPr lvl="3"/>
             <a:r>
-              <a:rPr lang="en-US"/>
+              <a:rPr lang="en-US" smtClean="0"/>
               <a:t>Fourth level</a:t>
             </a:r>
           </a:p>
           <a:p>
             <a:pPr lvl="4"/>
             <a:r>
-              <a:rPr lang="en-US"/>
+              <a:rPr lang="en-US" smtClean="0"/>
               <a:t>Fifth level</a:t>
             </a:r>
+            <a:endParaRPr lang="en-US"/>
           </a:p>
         </p:txBody>
       </p:sp>
@@ -1779,7 +1778,7 @@
           <a:p>
             <a:fld id="{5BCAD085-E8A6-8845-BD4E-CB4CCA059FC4}" type="datetimeFigureOut">
               <a:rPr lang="en-US" smtClean="0"/>
-              <a:t>5/29/2026</a:t>
+              <a:t>1/27/13</a:t>
             </a:fld>
             <a:endParaRPr lang="en-US"/>
           </a:p>
@@ -1873,9 +1872,10 @@
           <a:lstStyle/>
           <a:p>
             <a:r>
-              <a:rPr lang="en-US"/>
+              <a:rPr lang="en-US" smtClean="0"/>
               <a:t>Click to edit Master title style</a:t>
             </a:r>
+            <a:endParaRPr lang="en-US"/>
           </a:p>
         </p:txBody>
       </p:sp>
@@ -1896,7 +1896,7 @@
           <a:p>
             <a:fld id="{5BCAD085-E8A6-8845-BD4E-CB4CCA059FC4}" type="datetimeFigureOut">
               <a:rPr lang="en-US" smtClean="0"/>
-              <a:t>5/29/2026</a:t>
+              <a:t>1/27/13</a:t>
             </a:fld>
             <a:endParaRPr lang="en-US"/>
           </a:p>
@@ -1991,7 +1991,7 @@
           <a:p>
             <a:fld id="{5BCAD085-E8A6-8845-BD4E-CB4CCA059FC4}" type="datetimeFigureOut">
               <a:rPr lang="en-US" smtClean="0"/>
-              <a:t>5/29/2026</a:t>
+              <a:t>1/27/13</a:t>
             </a:fld>
             <a:endParaRPr lang="en-US"/>
           </a:p>
@@ -2094,9 +2094,10 @@
           </a:lstStyle>
           <a:p>
             <a:r>
-              <a:rPr lang="en-US"/>
+              <a:rPr lang="en-US" smtClean="0"/>
               <a:t>Click to edit Master title style</a:t>
             </a:r>
+            <a:endParaRPr lang="en-US"/>
           </a:p>
         </p:txBody>
       </p:sp>
@@ -2150,37 +2151,38 @@
           <a:p>
             <a:pPr lvl="0"/>
             <a:r>
-              <a:rPr lang="en-US"/>
+              <a:rPr lang="en-US" smtClean="0"/>
               <a:t>Click to edit Master text styles</a:t>
             </a:r>
           </a:p>
           <a:p>
             <a:pPr lvl="1"/>
             <a:r>
-              <a:rPr lang="en-US"/>
+              <a:rPr lang="en-US" smtClean="0"/>
               <a:t>Second level</a:t>
             </a:r>
           </a:p>
           <a:p>
             <a:pPr lvl="2"/>
             <a:r>
-              <a:rPr lang="en-US"/>
+              <a:rPr lang="en-US" smtClean="0"/>
               <a:t>Third level</a:t>
             </a:r>
           </a:p>
           <a:p>
             <a:pPr lvl="3"/>
             <a:r>
-              <a:rPr lang="en-US"/>
+              <a:rPr lang="en-US" smtClean="0"/>
               <a:t>Fourth level</a:t>
             </a:r>
           </a:p>
           <a:p>
             <a:pPr lvl="4"/>
             <a:r>
-              <a:rPr lang="en-US"/>
+              <a:rPr lang="en-US" smtClean="0"/>
               <a:t>Fifth level</a:t>
             </a:r>
+            <a:endParaRPr lang="en-US"/>
           </a:p>
         </p:txBody>
       </p:sp>
@@ -2243,7 +2245,7 @@
           <a:p>
             <a:pPr lvl="0"/>
             <a:r>
-              <a:rPr lang="en-US"/>
+              <a:rPr lang="en-US" smtClean="0"/>
               <a:t>Click to edit Master text styles</a:t>
             </a:r>
           </a:p>
@@ -2266,7 +2268,7 @@
           <a:p>
             <a:fld id="{5BCAD085-E8A6-8845-BD4E-CB4CCA059FC4}" type="datetimeFigureOut">
               <a:rPr lang="en-US" smtClean="0"/>
-              <a:t>5/29/2026</a:t>
+              <a:t>1/27/13</a:t>
             </a:fld>
             <a:endParaRPr lang="en-US"/>
           </a:p>
@@ -2369,9 +2371,10 @@
           </a:lstStyle>
           <a:p>
             <a:r>
-              <a:rPr lang="en-US"/>
+              <a:rPr lang="en-US" smtClean="0"/>
               <a:t>Click to edit Master title style</a:t>
             </a:r>
+            <a:endParaRPr lang="en-US"/>
           </a:p>
         </p:txBody>
       </p:sp>
@@ -2495,7 +2498,7 @@
           <a:p>
             <a:pPr lvl="0"/>
             <a:r>
-              <a:rPr lang="en-US"/>
+              <a:rPr lang="en-US" smtClean="0"/>
               <a:t>Click to edit Master text styles</a:t>
             </a:r>
           </a:p>
@@ -2518,7 +2521,7 @@
           <a:p>
             <a:fld id="{5BCAD085-E8A6-8845-BD4E-CB4CCA059FC4}" type="datetimeFigureOut">
               <a:rPr lang="en-US" smtClean="0"/>
-              <a:t>5/29/2026</a:t>
+              <a:t>1/27/13</a:t>
             </a:fld>
             <a:endParaRPr lang="en-US"/>
           </a:p>
@@ -2627,9 +2630,10 @@
           <a:lstStyle/>
           <a:p>
             <a:r>
-              <a:rPr lang="en-US"/>
+              <a:rPr lang="en-US" smtClean="0"/>
               <a:t>Click to edit Master title style</a:t>
             </a:r>
+            <a:endParaRPr lang="en-US"/>
           </a:p>
         </p:txBody>
       </p:sp>
@@ -2660,37 +2664,38 @@
           <a:p>
             <a:pPr lvl="0"/>
             <a:r>
-              <a:rPr lang="en-US"/>
+              <a:rPr lang="en-US" smtClean="0"/>
               <a:t>Click to edit Master text styles</a:t>
             </a:r>
           </a:p>
           <a:p>
             <a:pPr lvl="1"/>
             <a:r>
-              <a:rPr lang="en-US"/>
+              <a:rPr lang="en-US" smtClean="0"/>
               <a:t>Second level</a:t>
             </a:r>
           </a:p>
           <a:p>
             <a:pPr lvl="2"/>
             <a:r>
-              <a:rPr lang="en-US"/>
+              <a:rPr lang="en-US" smtClean="0"/>
               <a:t>Third level</a:t>
             </a:r>
           </a:p>
           <a:p>
             <a:pPr lvl="3"/>
             <a:r>
-              <a:rPr lang="en-US"/>
+              <a:rPr lang="en-US" smtClean="0"/>
               <a:t>Fourth level</a:t>
             </a:r>
           </a:p>
           <a:p>
             <a:pPr lvl="4"/>
             <a:r>
-              <a:rPr lang="en-US"/>
+              <a:rPr lang="en-US" smtClean="0"/>
               <a:t>Fifth level</a:t>
             </a:r>
+            <a:endParaRPr lang="en-US"/>
           </a:p>
         </p:txBody>
       </p:sp>
@@ -2729,7 +2734,7 @@
           <a:p>
             <a:fld id="{5BCAD085-E8A6-8845-BD4E-CB4CCA059FC4}" type="datetimeFigureOut">
               <a:rPr lang="en-US" smtClean="0"/>
-              <a:t>5/29/2026</a:t>
+              <a:t>1/27/13</a:t>
             </a:fld>
             <a:endParaRPr lang="en-US"/>
           </a:p>
@@ -3088,7 +3093,7 @@
 </file>
 
 <file path=ppt/slides/slide1.xml><?xml version="1.0" encoding="utf-8"?>
-<p:sld xmlns:a="http://schemas.openxmlformats.org/drawingml/2006/main" xmlns:r="http://schemas.openxmlformats.org/officeDocument/2006/relationships" xmlns:p="http://schemas.openxmlformats.org/presentationml/2006/main">
+<p:sld xmlns:a="http://schemas.openxmlformats.org/drawingml/2006/main" xmlns:p="http://schemas.openxmlformats.org/presentationml/2006/main" xmlns:r="http://schemas.openxmlformats.org/officeDocument/2006/relationships">
   <p:cSld>
     <p:bg>
       <p:bgPr>
@@ -3104,14 +3109,7 @@
         <p:cNvGrpSpPr/>
         <p:nvPr/>
       </p:nvGrpSpPr>
-      <p:grpSpPr>
-        <a:xfrm>
-          <a:off x="0" y="0"/>
-          <a:ext cx="0" cy="0"/>
-          <a:chOff x="0" y="0"/>
-          <a:chExt cx="0" cy="0"/>
-        </a:xfrm>
-      </p:grpSpPr>
+      <p:grpSpPr/>
       <p:sp>
         <p:nvSpPr>
           <p:cNvPr id="2" name="Rectangle 1"/>
@@ -3152,7 +3150,6 @@
           <a:lstStyle/>
           <a:p>
             <a:pPr algn="ctr"/>
-            <a:endParaRPr/>
           </a:p>
         </p:txBody>
       </p:sp>
@@ -3187,7 +3184,7 @@
               </a:defRPr>
             </a:pPr>
             <a:r>
-              <a:t>NGHIÊN CỨU MÔ HÌNH LIGHTWEIGHT MLLM</a:t>
+              <a:t>RESEARCH ON LIGHTWEIGHT MLLM</a:t>
             </a:r>
           </a:p>
         </p:txBody>
@@ -3223,7 +3220,7 @@
               </a:defRPr>
             </a:pPr>
             <a:r>
-              <a:t>CHO OCR TIẾNG VIỆT</a:t>
+              <a:t>FOR VIETNAMESE OCR</a:t>
             </a:r>
           </a:p>
         </p:txBody>
@@ -3268,7 +3265,6 @@
           <a:lstStyle/>
           <a:p>
             <a:pPr algn="ctr"/>
-            <a:endParaRPr/>
           </a:p>
         </p:txBody>
       </p:sp>
@@ -3295,7 +3291,7 @@
           <a:lstStyle/>
           <a:p>
             <a:pPr algn="ctr">
-              <a:defRPr sz="1400" b="0">
+              <a:defRPr sz="1500" b="0">
                 <a:solidFill>
                   <a:srgbClr val="94A3B8"/>
                 </a:solidFill>
@@ -3303,7 +3299,7 @@
               </a:defRPr>
             </a:pPr>
             <a:r>
-              <a:t>Research on Lightweight Multimodal Large Language Models for Vietnamese OCR</a:t>
+              <a:t>Fine-tuning GLM-OCR for Diacritical Mark Recognition</a:t>
             </a:r>
           </a:p>
         </p:txBody>
@@ -3350,7 +3346,6 @@
           <a:lstStyle/>
           <a:p>
             <a:pPr algn="ctr"/>
-            <a:endParaRPr/>
           </a:p>
         </p:txBody>
       </p:sp>
@@ -3385,7 +3380,7 @@
               </a:defRPr>
             </a:pPr>
             <a:r>
-              <a:t>Nhóm thực hiện</a:t>
+              <a:t>Team Members</a:t>
             </a:r>
           </a:p>
         </p:txBody>
@@ -3424,7 +3419,7 @@
               </a:defRPr>
             </a:pPr>
             <a:r>
-              <a:t>250201052  —  Nguyễn Tuấn Dũng</a:t>
+              <a:t>250201052  —  Nguyen Tuan Dung</a:t>
             </a:r>
           </a:p>
           <a:p>
@@ -3440,7 +3435,7 @@
               </a:defRPr>
             </a:pPr>
             <a:r>
-              <a:t>250201068  —  Nguyễn Trọng Kiên</a:t>
+              <a:t>250201068  —  Nguyen Trong Kien</a:t>
             </a:r>
           </a:p>
           <a:p>
@@ -3456,7 +3451,7 @@
               </a:defRPr>
             </a:pPr>
             <a:r>
-              <a:t>250201072  —  Phạm Nhật Linh</a:t>
+              <a:t>250201072  —  Pham Nhat Linh</a:t>
             </a:r>
           </a:p>
           <a:p>
@@ -3471,7 +3466,6 @@
                 <a:latin typeface="Segoe UI"/>
               </a:defRPr>
             </a:pPr>
-            <a:endParaRPr/>
           </a:p>
           <a:p>
             <a:pPr>
@@ -3486,7 +3480,7 @@
               </a:defRPr>
             </a:pPr>
             <a:r>
-              <a:t>Giảng viên hướng dẫn: ............................</a:t>
+              <a:t>Advisor: ............................</a:t>
             </a:r>
           </a:p>
         </p:txBody>
@@ -3500,7 +3494,7 @@
         <p:spPr>
           <a:xfrm>
             <a:off x="914400" y="6126480"/>
-            <a:ext cx="10058400" cy="261610"/>
+            <a:ext cx="10058400" cy="365760"/>
           </a:xfrm>
           <a:prstGeom prst="rect">
             <a:avLst/>
@@ -3522,52 +3516,7 @@
               </a:defRPr>
             </a:pPr>
             <a:r>
-              <a:rPr dirty="0" err="1"/>
-              <a:t>Đại</a:t>
-            </a:r>
-            <a:r>
-              <a:rPr dirty="0"/>
-              <a:t> </a:t>
-            </a:r>
-            <a:r>
-              <a:rPr dirty="0" err="1"/>
-              <a:t>học</a:t>
-            </a:r>
-            <a:r>
-              <a:rPr dirty="0"/>
-              <a:t> Công </a:t>
-            </a:r>
-            <a:r>
-              <a:rPr dirty="0" err="1"/>
-              <a:t>nghệ</a:t>
-            </a:r>
-            <a:r>
-              <a:rPr dirty="0"/>
-              <a:t> Thông Tin  •  Khoa </a:t>
-            </a:r>
-            <a:r>
-              <a:rPr lang="en-US" dirty="0"/>
-              <a:t>Công </a:t>
-            </a:r>
-            <a:r>
-              <a:rPr lang="en-US" dirty="0" err="1"/>
-              <a:t>Nghệ</a:t>
-            </a:r>
-            <a:r>
-              <a:rPr lang="en-US" dirty="0"/>
-              <a:t> Thông Tin</a:t>
-            </a:r>
-            <a:r>
-              <a:rPr dirty="0"/>
-              <a:t>•  </a:t>
-            </a:r>
-            <a:r>
-              <a:rPr dirty="0" err="1"/>
-              <a:t>Tháng</a:t>
-            </a:r>
-            <a:r>
-              <a:rPr dirty="0"/>
-              <a:t> 5/2026</a:t>
+              <a:t>University of Information Technology  •  Faculty of Computer Science  •  May 2026</a:t>
             </a:r>
           </a:p>
         </p:txBody>
@@ -3617,7 +3566,7 @@
 </file>
 
 <file path=ppt/slides/slide10.xml><?xml version="1.0" encoding="utf-8"?>
-<p:sld xmlns:a="http://schemas.openxmlformats.org/drawingml/2006/main" xmlns:r="http://schemas.openxmlformats.org/officeDocument/2006/relationships" xmlns:p="http://schemas.openxmlformats.org/presentationml/2006/main">
+<p:sld xmlns:a="http://schemas.openxmlformats.org/drawingml/2006/main" xmlns:p="http://schemas.openxmlformats.org/presentationml/2006/main" xmlns:r="http://schemas.openxmlformats.org/officeDocument/2006/relationships">
   <p:cSld>
     <p:bg>
       <p:bgPr>
@@ -3633,14 +3582,7 @@
         <p:cNvGrpSpPr/>
         <p:nvPr/>
       </p:nvGrpSpPr>
-      <p:grpSpPr>
-        <a:xfrm>
-          <a:off x="0" y="0"/>
-          <a:ext cx="0" cy="0"/>
-          <a:chOff x="0" y="0"/>
-          <a:chExt cx="0" cy="0"/>
-        </a:xfrm>
-      </p:grpSpPr>
+      <p:grpSpPr/>
       <p:sp>
         <p:nvSpPr>
           <p:cNvPr id="2" name="Rectangle 1"/>
@@ -3681,7 +3623,6 @@
           <a:lstStyle/>
           <a:p>
             <a:pPr algn="ctr"/>
-            <a:endParaRPr/>
           </a:p>
         </p:txBody>
       </p:sp>
@@ -3716,7 +3657,7 @@
               </a:defRPr>
             </a:pPr>
             <a:r>
-              <a:t>HUẤN LUYỆN &amp; TỐI ƯU</a:t>
+              <a:t>TRAINING CONFIGURATION</a:t>
             </a:r>
           </a:p>
         </p:txBody>
@@ -3763,7 +3704,6 @@
           <a:lstStyle/>
           <a:p>
             <a:pPr algn="ctr"/>
-            <a:endParaRPr/>
           </a:p>
         </p:txBody>
       </p:sp>
@@ -3884,7 +3824,6 @@
                 <a:latin typeface="Segoe UI"/>
               </a:defRPr>
             </a:pPr>
-            <a:endParaRPr/>
           </a:p>
           <a:p>
             <a:pPr>
@@ -3946,7 +3885,6 @@
                 <a:latin typeface="Segoe UI"/>
               </a:defRPr>
             </a:pPr>
-            <a:endParaRPr/>
           </a:p>
           <a:p>
             <a:pPr>
@@ -4008,7 +3946,6 @@
           <a:lstStyle/>
           <a:p>
             <a:pPr algn="ctr"/>
-            <a:endParaRPr/>
           </a:p>
         </p:txBody>
       </p:sp>
@@ -4098,7 +4035,7 @@
               </a:defRPr>
             </a:pPr>
             <a:r>
-              <a:t>LR = 5e-5 (thấp hơn S1)</a:t>
+              <a:t>LR = 5e-5 (lower than S1)</a:t>
             </a:r>
           </a:p>
           <a:p>
@@ -4114,7 +4051,7 @@
               </a:defRPr>
             </a:pPr>
             <a:r>
-              <a:t>Cutoff = 4096 (gấp đôi S1)</a:t>
+              <a:t>Cutoff = 4096 (2× S1)</a:t>
             </a:r>
           </a:p>
           <a:p>
@@ -4129,7 +4066,6 @@
                 <a:latin typeface="Segoe UI"/>
               </a:defRPr>
             </a:pPr>
-            <a:endParaRPr/>
           </a:p>
           <a:p>
             <a:pPr>
@@ -4191,7 +4127,6 @@
                 <a:latin typeface="Segoe UI"/>
               </a:defRPr>
             </a:pPr>
-            <a:endParaRPr/>
           </a:p>
           <a:p>
             <a:pPr>
@@ -4206,7 +4141,7 @@
               </a:defRPr>
             </a:pPr>
             <a:r>
-              <a:t>Eval mỗi 200 steps on 50 val samples</a:t>
+              <a:t>Eval every 200 steps on 50 val samples</a:t>
             </a:r>
           </a:p>
         </p:txBody>
@@ -4253,7 +4188,6 @@
           <a:lstStyle/>
           <a:p>
             <a:pPr algn="ctr"/>
-            <a:endParaRPr/>
           </a:p>
         </p:txBody>
       </p:sp>
@@ -4288,7 +4222,7 @@
               </a:defRPr>
             </a:pPr>
             <a:r>
-              <a:t>🔑 Quyết định thiết kế quan trọng</a:t>
+              <a:t>🔑 Key Design Decisions</a:t>
             </a:r>
           </a:p>
         </p:txBody>
@@ -4336,7 +4270,7 @@
                 </a:solidFill>
                 <a:latin typeface="Segoe UI"/>
               </a:rPr>
-              <a:t> Xây dựng từ điển thị giác mới cho dấu VN, giữ nguyên ViT knowledge</a:t>
+              <a:t> Build new visual dictionary for VN diacritics, preserve ViT knowledge</a:t>
             </a:r>
           </a:p>
           <a:p>
@@ -4361,7 +4295,7 @@
                 </a:solidFill>
                 <a:latin typeface="Segoe UI"/>
               </a:rPr>
-              <a:t> Cho phép resume training mà LR không giảm về 0 (khác cosine)</a:t>
+              <a:t> Enables training resume without LR decaying to zero (vs. cosine)</a:t>
             </a:r>
           </a:p>
           <a:p>
@@ -4377,7 +4311,7 @@
                 </a:solidFill>
                 <a:latin typeface="Segoe UI"/>
               </a:rPr>
-              <a:t>Auto-resume trên Colab: </a:t>
+              <a:t>Auto-resume on Colab: </a:t>
             </a:r>
             <a:r>
               <a:rPr sz="1300">
@@ -4386,7 +4320,7 @@
                 </a:solidFill>
                 <a:latin typeface="Segoe UI"/>
               </a:rPr>
-              <a:t> Detect checkpoint cuối trên Drive → tính epoch tiếp theo tự động</a:t>
+              <a:t> Detect latest checkpoint on Drive → compute next epoch automatically</a:t>
             </a:r>
           </a:p>
           <a:p>
@@ -4411,7 +4345,7 @@
                 </a:solidFill>
                 <a:latin typeface="Segoe UI"/>
               </a:rPr>
-              <a:t> Generator ghi split counts → Notebook đọc chính xác, không hardcode</a:t>
+              <a:t> Generator writes split counts → Notebook reads accurately, no hardcoding</a:t>
             </a:r>
           </a:p>
         </p:txBody>
@@ -4461,7 +4395,7 @@
 </file>
 
 <file path=ppt/slides/slide11.xml><?xml version="1.0" encoding="utf-8"?>
-<p:sld xmlns:a="http://schemas.openxmlformats.org/drawingml/2006/main" xmlns:r="http://schemas.openxmlformats.org/officeDocument/2006/relationships" xmlns:p="http://schemas.openxmlformats.org/presentationml/2006/main">
+<p:sld xmlns:a="http://schemas.openxmlformats.org/drawingml/2006/main" xmlns:p="http://schemas.openxmlformats.org/presentationml/2006/main" xmlns:r="http://schemas.openxmlformats.org/officeDocument/2006/relationships">
   <p:cSld>
     <p:bg>
       <p:bgPr>
@@ -4477,14 +4411,7 @@
         <p:cNvGrpSpPr/>
         <p:nvPr/>
       </p:nvGrpSpPr>
-      <p:grpSpPr>
-        <a:xfrm>
-          <a:off x="0" y="0"/>
-          <a:ext cx="0" cy="0"/>
-          <a:chOff x="0" y="0"/>
-          <a:chExt cx="0" cy="0"/>
-        </a:xfrm>
-      </p:grpSpPr>
+      <p:grpSpPr/>
       <p:sp>
         <p:nvSpPr>
           <p:cNvPr id="2" name="Rectangle 1"/>
@@ -4525,7 +4452,6 @@
           <a:lstStyle/>
           <a:p>
             <a:pPr algn="ctr"/>
-            <a:endParaRPr/>
           </a:p>
         </p:txBody>
       </p:sp>
@@ -4560,7 +4486,7 @@
               </a:defRPr>
             </a:pPr>
             <a:r>
-              <a:t>HỆ THỐNG ĐÁNH GIÁ</a:t>
+              <a:t>EVALUATION FRAMEWORK</a:t>
             </a:r>
           </a:p>
         </p:txBody>
@@ -4584,27 +4510,9 @@
                 <a:tableStyleId>{5C22544A-7EE6-4342-B048-85BDC9FD1C3A}</a:tableStyleId>
               </a:tblPr>
               <a:tblGrid>
-                <a:gridCol w="2249424">
-                  <a:extLst>
-                    <a:ext uri="{9D8B030D-6E8A-4147-A177-3AD203B41FA5}">
-                      <a16:colId xmlns:a16="http://schemas.microsoft.com/office/drawing/2014/main" val="20000"/>
-                    </a:ext>
-                  </a:extLst>
-                </a:gridCol>
-                <a:gridCol w="3936491">
-                  <a:extLst>
-                    <a:ext uri="{9D8B030D-6E8A-4147-A177-3AD203B41FA5}">
-                      <a16:colId xmlns:a16="http://schemas.microsoft.com/office/drawing/2014/main" val="20001"/>
-                    </a:ext>
-                  </a:extLst>
-                </a:gridCol>
-                <a:gridCol w="5061204">
-                  <a:extLst>
-                    <a:ext uri="{9D8B030D-6E8A-4147-A177-3AD203B41FA5}">
-                      <a16:colId xmlns:a16="http://schemas.microsoft.com/office/drawing/2014/main" val="20002"/>
-                    </a:ext>
-                  </a:extLst>
-                </a:gridCol>
+                <a:gridCol w="2249424"/>
+                <a:gridCol w="3936491"/>
+                <a:gridCol w="5061204"/>
               </a:tblGrid>
               <a:tr h="365760">
                 <a:tc>
@@ -4645,7 +4553,7 @@
                         </a:defRPr>
                       </a:pPr>
                       <a:r>
-                        <a:t>Mô tả</a:t>
+                        <a:t>Description</a:t>
                       </a:r>
                     </a:p>
                   </a:txBody>
@@ -4669,7 +4577,7 @@
                         </a:defRPr>
                       </a:pPr>
                       <a:r>
-                        <a:t>Phương pháp</a:t>
+                        <a:t>Method</a:t>
                       </a:r>
                     </a:p>
                   </a:txBody>
@@ -4679,11 +4587,6 @@
                     </a:solidFill>
                   </a:tcPr>
                 </a:tc>
-                <a:extLst>
-                  <a:ext uri="{0D108BD9-81ED-4DB2-BD59-A6C34878D82A}">
-                    <a16:rowId xmlns:a16="http://schemas.microsoft.com/office/drawing/2014/main" val="10000"/>
-                  </a:ext>
-                </a:extLst>
               </a:tr>
               <a:tr h="365760">
                 <a:tc>
@@ -4748,7 +4651,7 @@
                         </a:defRPr>
                       </a:pPr>
                       <a:r>
-                        <a:t>Edit distance / tổng ký tự</a:t>
+                        <a:t>Edit distance / total characters</a:t>
                       </a:r>
                     </a:p>
                   </a:txBody>
@@ -4758,11 +4661,6 @@
                     </a:solidFill>
                   </a:tcPr>
                 </a:tc>
-                <a:extLst>
-                  <a:ext uri="{0D108BD9-81ED-4DB2-BD59-A6C34878D82A}">
-                    <a16:rowId xmlns:a16="http://schemas.microsoft.com/office/drawing/2014/main" val="10001"/>
-                  </a:ext>
-                </a:extLst>
               </a:tr>
               <a:tr h="365760">
                 <a:tc>
@@ -4837,11 +4735,6 @@
                     </a:solidFill>
                   </a:tcPr>
                 </a:tc>
-                <a:extLst>
-                  <a:ext uri="{0D108BD9-81ED-4DB2-BD59-A6C34878D82A}">
-                    <a16:rowId xmlns:a16="http://schemas.microsoft.com/office/drawing/2014/main" val="10002"/>
-                  </a:ext>
-                </a:extLst>
               </a:tr>
               <a:tr h="365760">
                 <a:tc>
@@ -4882,7 +4775,7 @@
                         </a:defRPr>
                       </a:pPr>
                       <a:r>
-                        <a:t>Độ chính xác theo nhóm dấu</a:t>
+                        <a:t>Per-group accuracy</a:t>
                       </a:r>
                     </a:p>
                   </a:txBody>
@@ -4906,7 +4799,7 @@
                         </a:defRPr>
                       </a:pPr>
                       <a:r>
-                        <a:t>7 nhóm: ă, â, ê, ô, ơ, ư, đ (Wagner-Fischer DP)</a:t>
+                        <a:t>7 groups: ă, â, ê, ô, ơ, ư, đ (Wagner-Fischer DP)</a:t>
                       </a:r>
                     </a:p>
                   </a:txBody>
@@ -4916,11 +4809,6 @@
                     </a:solidFill>
                   </a:tcPr>
                 </a:tc>
-                <a:extLst>
-                  <a:ext uri="{0D108BD9-81ED-4DB2-BD59-A6C34878D82A}">
-                    <a16:rowId xmlns:a16="http://schemas.microsoft.com/office/drawing/2014/main" val="10003"/>
-                  </a:ext>
-                </a:extLst>
               </a:tr>
               <a:tr h="365760">
                 <a:tc>
@@ -4961,7 +4849,7 @@
                         </a:defRPr>
                       </a:pPr>
                       <a:r>
-                        <a:t>Tỷ lệ thêm dấu sai</a:t>
+                        <a:t>Spurious diacritics rate</a:t>
                       </a:r>
                     </a:p>
                   </a:txBody>
@@ -4995,11 +4883,6 @@
                     </a:solidFill>
                   </a:tcPr>
                 </a:tc>
-                <a:extLst>
-                  <a:ext uri="{0D108BD9-81ED-4DB2-BD59-A6C34878D82A}">
-                    <a16:rowId xmlns:a16="http://schemas.microsoft.com/office/drawing/2014/main" val="10004"/>
-                  </a:ext>
-                </a:extLst>
               </a:tr>
               <a:tr h="365760">
                 <a:tc>
@@ -5040,7 +4923,7 @@
                         </a:defRPr>
                       </a:pPr>
                       <a:r>
-                        <a:t>Khớp chính xác theo vị trí</a:t>
+                        <a:t>Exact word match</a:t>
                       </a:r>
                     </a:p>
                   </a:txBody>
@@ -5064,7 +4947,7 @@
                         </a:defRPr>
                       </a:pPr>
                       <a:r>
-                        <a:t>Word-aligned comparison</a:t>
+                        <a:t>Position-aligned comparison</a:t>
                       </a:r>
                     </a:p>
                   </a:txBody>
@@ -5074,11 +4957,6 @@
                     </a:solidFill>
                   </a:tcPr>
                 </a:tc>
-                <a:extLst>
-                  <a:ext uri="{0D108BD9-81ED-4DB2-BD59-A6C34878D82A}">
-                    <a16:rowId xmlns:a16="http://schemas.microsoft.com/office/drawing/2014/main" val="10005"/>
-                  </a:ext>
-                </a:extLst>
               </a:tr>
               <a:tr h="365760">
                 <a:tc>
@@ -5119,7 +4997,7 @@
                         </a:defRPr>
                       </a:pPr>
                       <a:r>
-                        <a:t>Tỷ lệ khớp 100%</a:t>
+                        <a:t>100% match rate</a:t>
                       </a:r>
                     </a:p>
                   </a:txBody>
@@ -5153,11 +5031,6 @@
                     </a:solidFill>
                   </a:tcPr>
                 </a:tc>
-                <a:extLst>
-                  <a:ext uri="{0D108BD9-81ED-4DB2-BD59-A6C34878D82A}">
-                    <a16:rowId xmlns:a16="http://schemas.microsoft.com/office/drawing/2014/main" val="10006"/>
-                  </a:ext>
-                </a:extLst>
               </a:tr>
             </a:tbl>
           </a:graphicData>
@@ -5205,7 +5078,6 @@
           <a:lstStyle/>
           <a:p>
             <a:pPr algn="ctr"/>
-            <a:endParaRPr/>
           </a:p>
         </p:txBody>
       </p:sp>
@@ -5240,7 +5112,7 @@
               </a:defRPr>
             </a:pPr>
             <a:r>
-              <a:t>⚠️  False Positive Rate — Metric quan trọng cho production: đo tỷ lệ model tự thêm dấu sai (vd: "ma" → "má"). Hai cơ chế anti-bias giảm FP: gen_plain_words (10%) + 30% strip diacritics.</a:t>
+              <a:t>⚠️  False Positive Rate — Critical metric for production: measures rate of spurious diacritical insertions (e.g., "ma" → "má"). Two anti-bias mechanisms reduce FP: gen_plain_words (10%) + 30% strip diacritics.</a:t>
             </a:r>
           </a:p>
         </p:txBody>
@@ -5287,7 +5159,6 @@
           <a:lstStyle/>
           <a:p>
             <a:pPr algn="ctr"/>
-            <a:endParaRPr/>
           </a:p>
         </p:txBody>
       </p:sp>
@@ -5322,7 +5193,7 @@
               </a:defRPr>
             </a:pPr>
             <a:r>
-              <a:t>🔬  Wagner-Fischer DP alignment → tạo (gt_char, pred_char) pairs → đánh giá chính xác từng nhóm dấu độc lập. So sánh tự động với base model gốc (download từ HuggingFace).</a:t>
+              <a:t>🔬  Wagner-Fischer DP alignment → produces (gt_char, pred_char) pairs → precise per-group diacritic evaluation. Automatic comparison with base model (downloaded from HuggingFace).</a:t>
             </a:r>
           </a:p>
         </p:txBody>
@@ -5372,7 +5243,7 @@
 </file>
 
 <file path=ppt/slides/slide12.xml><?xml version="1.0" encoding="utf-8"?>
-<p:sld xmlns:a="http://schemas.openxmlformats.org/drawingml/2006/main" xmlns:r="http://schemas.openxmlformats.org/officeDocument/2006/relationships" xmlns:p="http://schemas.openxmlformats.org/presentationml/2006/main">
+<p:sld xmlns:a="http://schemas.openxmlformats.org/drawingml/2006/main" xmlns:p="http://schemas.openxmlformats.org/presentationml/2006/main" xmlns:r="http://schemas.openxmlformats.org/officeDocument/2006/relationships">
   <p:cSld>
     <p:bg>
       <p:bgPr>
@@ -5388,14 +5259,7 @@
         <p:cNvGrpSpPr/>
         <p:nvPr/>
       </p:nvGrpSpPr>
-      <p:grpSpPr>
-        <a:xfrm>
-          <a:off x="0" y="0"/>
-          <a:ext cx="0" cy="0"/>
-          <a:chOff x="0" y="0"/>
-          <a:chExt cx="0" cy="0"/>
-        </a:xfrm>
-      </p:grpSpPr>
+      <p:grpSpPr/>
       <p:sp>
         <p:nvSpPr>
           <p:cNvPr id="2" name="Rectangle 1"/>
@@ -5436,7 +5300,6 @@
           <a:lstStyle/>
           <a:p>
             <a:pPr algn="ctr"/>
-            <a:endParaRPr/>
           </a:p>
         </p:txBody>
       </p:sp>
@@ -5471,7 +5334,7 @@
               </a:defRPr>
             </a:pPr>
             <a:r>
-              <a:t>KẾT QUẢ</a:t>
+              <a:t>RESULTS</a:t>
             </a:r>
           </a:p>
         </p:txBody>
@@ -5507,7 +5370,7 @@
               </a:defRPr>
             </a:pPr>
             <a:r>
-              <a:t>📊 Dataset đã tạo</a:t>
+              <a:t>📊 Generated Datasets</a:t>
             </a:r>
           </a:p>
         </p:txBody>
@@ -5531,55 +5394,13 @@
                 <a:tableStyleId>{5C22544A-7EE6-4342-B048-85BDC9FD1C3A}</a:tableStyleId>
               </a:tblPr>
               <a:tblGrid>
-                <a:gridCol w="1799539">
-                  <a:extLst>
-                    <a:ext uri="{9D8B030D-6E8A-4147-A177-3AD203B41FA5}">
-                      <a16:colId xmlns:a16="http://schemas.microsoft.com/office/drawing/2014/main" val="20000"/>
-                    </a:ext>
-                  </a:extLst>
-                </a:gridCol>
-                <a:gridCol w="1012240">
-                  <a:extLst>
-                    <a:ext uri="{9D8B030D-6E8A-4147-A177-3AD203B41FA5}">
-                      <a16:colId xmlns:a16="http://schemas.microsoft.com/office/drawing/2014/main" val="20001"/>
-                    </a:ext>
-                  </a:extLst>
-                </a:gridCol>
-                <a:gridCol w="674827">
-                  <a:extLst>
-                    <a:ext uri="{9D8B030D-6E8A-4147-A177-3AD203B41FA5}">
-                      <a16:colId xmlns:a16="http://schemas.microsoft.com/office/drawing/2014/main" val="20002"/>
-                    </a:ext>
-                  </a:extLst>
-                </a:gridCol>
-                <a:gridCol w="674827">
-                  <a:extLst>
-                    <a:ext uri="{9D8B030D-6E8A-4147-A177-3AD203B41FA5}">
-                      <a16:colId xmlns:a16="http://schemas.microsoft.com/office/drawing/2014/main" val="20003"/>
-                    </a:ext>
-                  </a:extLst>
-                </a:gridCol>
-                <a:gridCol w="1124712">
-                  <a:extLst>
-                    <a:ext uri="{9D8B030D-6E8A-4147-A177-3AD203B41FA5}">
-                      <a16:colId xmlns:a16="http://schemas.microsoft.com/office/drawing/2014/main" val="20004"/>
-                    </a:ext>
-                  </a:extLst>
-                </a:gridCol>
-                <a:gridCol w="1124712">
-                  <a:extLst>
-                    <a:ext uri="{9D8B030D-6E8A-4147-A177-3AD203B41FA5}">
-                      <a16:colId xmlns:a16="http://schemas.microsoft.com/office/drawing/2014/main" val="20005"/>
-                    </a:ext>
-                  </a:extLst>
-                </a:gridCol>
-                <a:gridCol w="3149193">
-                  <a:extLst>
-                    <a:ext uri="{9D8B030D-6E8A-4147-A177-3AD203B41FA5}">
-                      <a16:colId xmlns:a16="http://schemas.microsoft.com/office/drawing/2014/main" val="20006"/>
-                    </a:ext>
-                  </a:extLst>
-                </a:gridCol>
+                <a:gridCol w="1799539"/>
+                <a:gridCol w="1012240"/>
+                <a:gridCol w="674827"/>
+                <a:gridCol w="674827"/>
+                <a:gridCol w="1124712"/>
+                <a:gridCol w="1124712"/>
+                <a:gridCol w="3149193"/>
               </a:tblGrid>
               <a:tr h="365760">
                 <a:tc>
@@ -5692,7 +5513,7 @@
                         </a:defRPr>
                       </a:pPr>
                       <a:r>
-                        <a:t>Tổng ảnh</a:t>
+                        <a:t>Total Images</a:t>
                       </a:r>
                     </a:p>
                   </a:txBody>
@@ -5716,7 +5537,7 @@
                         </a:defRPr>
                       </a:pPr>
                       <a:r>
-                        <a:t>Dung lượng</a:t>
+                        <a:t>Size</a:t>
                       </a:r>
                     </a:p>
                   </a:txBody>
@@ -5740,7 +5561,7 @@
                         </a:defRPr>
                       </a:pPr>
                       <a:r>
-                        <a:t>Nguồn</a:t>
+                        <a:t>Source</a:t>
                       </a:r>
                     </a:p>
                   </a:txBody>
@@ -5750,11 +5571,6 @@
                     </a:solidFill>
                   </a:tcPr>
                 </a:tc>
-                <a:extLst>
-                  <a:ext uri="{0D108BD9-81ED-4DB2-BD59-A6C34878D82A}">
-                    <a16:rowId xmlns:a16="http://schemas.microsoft.com/office/drawing/2014/main" val="10000"/>
-                  </a:ext>
-                </a:extLst>
               </a:tr>
               <a:tr h="365760">
                 <a:tc>
@@ -5795,7 +5611,7 @@
                         </a:defRPr>
                       </a:pPr>
                       <a:r>
-                        <a:t>50.000</a:t>
+                        <a:t>50,000</a:t>
                       </a:r>
                     </a:p>
                   </a:txBody>
@@ -5867,7 +5683,7 @@
                         </a:defRPr>
                       </a:pPr>
                       <a:r>
-                        <a:t>100.390</a:t>
+                        <a:t>100,390</a:t>
                       </a:r>
                     </a:p>
                   </a:txBody>
@@ -5915,7 +5731,7 @@
                         </a:defRPr>
                       </a:pPr>
                       <a:r>
-                        <a:t>Từ điển + augmentation</a:t>
+                        <a:t>Dictionary + augmentation</a:t>
                       </a:r>
                     </a:p>
                   </a:txBody>
@@ -5925,11 +5741,6 @@
                     </a:solidFill>
                   </a:tcPr>
                 </a:tc>
-                <a:extLst>
-                  <a:ext uri="{0D108BD9-81ED-4DB2-BD59-A6C34878D82A}">
-                    <a16:rowId xmlns:a16="http://schemas.microsoft.com/office/drawing/2014/main" val="10001"/>
-                  </a:ext>
-                </a:extLst>
               </a:tr>
               <a:tr h="365760">
                 <a:tc>
@@ -5970,7 +5781,7 @@
                         </a:defRPr>
                       </a:pPr>
                       <a:r>
-                        <a:t>10.000</a:t>
+                        <a:t>10,000</a:t>
                       </a:r>
                     </a:p>
                   </a:txBody>
@@ -6042,7 +5853,7 @@
                         </a:defRPr>
                       </a:pPr>
                       <a:r>
-                        <a:t>10.100</a:t>
+                        <a:t>10,100</a:t>
                       </a:r>
                     </a:p>
                   </a:txBody>
@@ -6090,7 +5901,7 @@
                         </a:defRPr>
                       </a:pPr>
                       <a:r>
-                        <a:t>RSS VNExpress, Tuổi Trẻ, Thanh Niên</a:t>
+                        <a:t>RSS VNExpress, Tuoi Tre, Thanh Nien</a:t>
                       </a:r>
                     </a:p>
                   </a:txBody>
@@ -6100,11 +5911,6 @@
                     </a:solidFill>
                   </a:tcPr>
                 </a:tc>
-                <a:extLst>
-                  <a:ext uri="{0D108BD9-81ED-4DB2-BD59-A6C34878D82A}">
-                    <a16:rowId xmlns:a16="http://schemas.microsoft.com/office/drawing/2014/main" val="10002"/>
-                  </a:ext>
-                </a:extLst>
               </a:tr>
             </a:tbl>
           </a:graphicData>
@@ -6141,7 +5947,7 @@
               </a:defRPr>
             </a:pPr>
             <a:r>
-              <a:t>🤖 Mô hình đã fine-tune</a:t>
+              <a:t>🤖 Fine-tuned Models</a:t>
             </a:r>
           </a:p>
         </p:txBody>
@@ -6165,48 +5971,12 @@
                 <a:tableStyleId>{5C22544A-7EE6-4342-B048-85BDC9FD1C3A}</a:tableStyleId>
               </a:tblPr>
               <a:tblGrid>
-                <a:gridCol w="1687068">
-                  <a:extLst>
-                    <a:ext uri="{9D8B030D-6E8A-4147-A177-3AD203B41FA5}">
-                      <a16:colId xmlns:a16="http://schemas.microsoft.com/office/drawing/2014/main" val="20000"/>
-                    </a:ext>
-                  </a:extLst>
-                </a:gridCol>
-                <a:gridCol w="1124712">
-                  <a:extLst>
-                    <a:ext uri="{9D8B030D-6E8A-4147-A177-3AD203B41FA5}">
-                      <a16:colId xmlns:a16="http://schemas.microsoft.com/office/drawing/2014/main" val="20001"/>
-                    </a:ext>
-                  </a:extLst>
-                </a:gridCol>
-                <a:gridCol w="1687068">
-                  <a:extLst>
-                    <a:ext uri="{9D8B030D-6E8A-4147-A177-3AD203B41FA5}">
-                      <a16:colId xmlns:a16="http://schemas.microsoft.com/office/drawing/2014/main" val="20002"/>
-                    </a:ext>
-                  </a:extLst>
-                </a:gridCol>
-                <a:gridCol w="1687068">
-                  <a:extLst>
-                    <a:ext uri="{9D8B030D-6E8A-4147-A177-3AD203B41FA5}">
-                      <a16:colId xmlns:a16="http://schemas.microsoft.com/office/drawing/2014/main" val="20003"/>
-                    </a:ext>
-                  </a:extLst>
-                </a:gridCol>
-                <a:gridCol w="1349654">
-                  <a:extLst>
-                    <a:ext uri="{9D8B030D-6E8A-4147-A177-3AD203B41FA5}">
-                      <a16:colId xmlns:a16="http://schemas.microsoft.com/office/drawing/2014/main" val="20004"/>
-                    </a:ext>
-                  </a:extLst>
-                </a:gridCol>
-                <a:gridCol w="2024481">
-                  <a:extLst>
-                    <a:ext uri="{9D8B030D-6E8A-4147-A177-3AD203B41FA5}">
-                      <a16:colId xmlns:a16="http://schemas.microsoft.com/office/drawing/2014/main" val="20005"/>
-                    </a:ext>
-                  </a:extLst>
-                </a:gridCol>
+                <a:gridCol w="1687068"/>
+                <a:gridCol w="1124712"/>
+                <a:gridCol w="1687068"/>
+                <a:gridCol w="1687068"/>
+                <a:gridCol w="1349654"/>
+                <a:gridCol w="2024481"/>
               </a:tblGrid>
               <a:tr h="365760">
                 <a:tc>
@@ -6319,7 +6089,7 @@
                         </a:defRPr>
                       </a:pPr>
                       <a:r>
-                        <a:t>Dung lượng</a:t>
+                        <a:t>Size</a:t>
                       </a:r>
                     </a:p>
                   </a:txBody>
@@ -6353,11 +6123,6 @@
                     </a:solidFill>
                   </a:tcPr>
                 </a:tc>
-                <a:extLst>
-                  <a:ext uri="{0D108BD9-81ED-4DB2-BD59-A6C34878D82A}">
-                    <a16:rowId xmlns:a16="http://schemas.microsoft.com/office/drawing/2014/main" val="10000"/>
-                  </a:ext>
-                </a:extLst>
               </a:tr>
               <a:tr h="365760">
                 <a:tc>
@@ -6504,11 +6269,6 @@
                     </a:solidFill>
                   </a:tcPr>
                 </a:tc>
-                <a:extLst>
-                  <a:ext uri="{0D108BD9-81ED-4DB2-BD59-A6C34878D82A}">
-                    <a16:rowId xmlns:a16="http://schemas.microsoft.com/office/drawing/2014/main" val="10001"/>
-                  </a:ext>
-                </a:extLst>
               </a:tr>
               <a:tr h="365760">
                 <a:tc>
@@ -6655,11 +6415,6 @@
                     </a:solidFill>
                   </a:tcPr>
                 </a:tc>
-                <a:extLst>
-                  <a:ext uri="{0D108BD9-81ED-4DB2-BD59-A6C34878D82A}">
-                    <a16:rowId xmlns:a16="http://schemas.microsoft.com/office/drawing/2014/main" val="10002"/>
-                  </a:ext>
-                </a:extLst>
               </a:tr>
             </a:tbl>
           </a:graphicData>
@@ -6707,7 +6462,6 @@
           <a:lstStyle/>
           <a:p>
             <a:pPr algn="ctr"/>
-            <a:endParaRPr/>
           </a:p>
         </p:txBody>
       </p:sp>
@@ -6742,7 +6496,7 @@
               </a:defRPr>
             </a:pPr>
             <a:r>
-              <a:t>💻 Tài nguyên huấn luyện</a:t>
+              <a:t>💻 Training Resources</a:t>
             </a:r>
           </a:p>
         </p:txBody>
@@ -6781,7 +6535,7 @@
               </a:defRPr>
             </a:pPr>
             <a:r>
-              <a:t>▸  GPU: Google Colab T4 (16 GB VRAM, dùng ~6.9 GB)</a:t>
+              <a:t>▸  GPU: Google Colab T4 (16 GB VRAM, using ~6.9 GB)</a:t>
             </a:r>
           </a:p>
           <a:p>
@@ -6797,7 +6551,7 @@
               </a:defRPr>
             </a:pPr>
             <a:r>
-              <a:t>▸  Thời gian: ~2 giờ/epoch (Stage 1)  |  Framework: LLaMA-Factory</a:t>
+              <a:t>▸  Time: ~2 hours/epoch (Stage 1)  |  Framework: LLaMA-Factory</a:t>
             </a:r>
           </a:p>
           <a:p>
@@ -6863,7 +6617,7 @@
 </file>
 
 <file path=ppt/slides/slide13.xml><?xml version="1.0" encoding="utf-8"?>
-<p:sld xmlns:a="http://schemas.openxmlformats.org/drawingml/2006/main" xmlns:r="http://schemas.openxmlformats.org/officeDocument/2006/relationships" xmlns:p="http://schemas.openxmlformats.org/presentationml/2006/main">
+<p:sld xmlns:a="http://schemas.openxmlformats.org/drawingml/2006/main" xmlns:p="http://schemas.openxmlformats.org/presentationml/2006/main" xmlns:r="http://schemas.openxmlformats.org/officeDocument/2006/relationships">
   <p:cSld>
     <p:bg>
       <p:bgPr>
@@ -6879,14 +6633,7 @@
         <p:cNvGrpSpPr/>
         <p:nvPr/>
       </p:nvGrpSpPr>
-      <p:grpSpPr>
-        <a:xfrm>
-          <a:off x="0" y="0"/>
-          <a:ext cx="0" cy="0"/>
-          <a:chOff x="0" y="0"/>
-          <a:chExt cx="0" cy="0"/>
-        </a:xfrm>
-      </p:grpSpPr>
+      <p:grpSpPr/>
       <p:sp>
         <p:nvSpPr>
           <p:cNvPr id="2" name="Rectangle 1"/>
@@ -6927,7 +6674,6 @@
           <a:lstStyle/>
           <a:p>
             <a:pPr algn="ctr"/>
-            <a:endParaRPr/>
           </a:p>
         </p:txBody>
       </p:sp>
@@ -6962,7 +6708,7 @@
               </a:defRPr>
             </a:pPr>
             <a:r>
-              <a:t>TRIỂN KHAI</a:t>
+              <a:t>DEPLOYMENT</a:t>
             </a:r>
           </a:p>
         </p:txBody>
@@ -7009,7 +6755,6 @@
           <a:lstStyle/>
           <a:p>
             <a:pPr algn="ctr"/>
-            <a:endParaRPr/>
           </a:p>
         </p:txBody>
       </p:sp>
@@ -7131,7 +6876,7 @@
               </a:defRPr>
             </a:pPr>
             <a:r>
-              <a:t>▸  Lưu safetensors + tokenizer</a:t>
+              <a:t>▸  Save safetensors + tokenizer</a:t>
             </a:r>
           </a:p>
         </p:txBody>
@@ -7178,7 +6923,6 @@
           <a:lstStyle/>
           <a:p>
             <a:pPr algn="ctr"/>
-            <a:endParaRPr/>
           </a:p>
         </p:txBody>
       </p:sp>
@@ -7252,7 +6996,7 @@
               </a:defRPr>
             </a:pPr>
             <a:r>
-              <a:t>▸  1 ảnh / nhiều ảnh / thư mục</a:t>
+              <a:t>▸  Single / batch / folder input</a:t>
             </a:r>
           </a:p>
           <a:p>
@@ -7347,7 +7091,6 @@
           <a:lstStyle/>
           <a:p>
             <a:pPr algn="ctr"/>
-            <a:endParaRPr/>
           </a:p>
         </p:txBody>
       </p:sp>
@@ -7382,7 +7125,7 @@
               </a:defRPr>
             </a:pPr>
             <a:r>
-              <a:t>🦙 Ollama Deploy</a:t>
+              <a:t>🦂 Ollama Deploy</a:t>
             </a:r>
           </a:p>
         </p:txBody>
@@ -7469,7 +7212,287 @@
               </a:defRPr>
             </a:pPr>
             <a:r>
-              <a:t>▸  1 lệnh deploy → sẵn sàng dùng</a:t>
+              <a:t>▸  One-command deploy ready</a:t>
+            </a:r>
+          </a:p>
+        </p:txBody>
+      </p:sp>
+      <p:sp>
+        <p:nvSpPr>
+          <p:cNvPr id="13" name="Rounded Rectangle 12"/>
+          <p:cNvSpPr/>
+          <p:nvPr/>
+        </p:nvSpPr>
+        <p:spPr>
+          <a:xfrm>
+            <a:off x="457200" y="3931920"/>
+            <a:ext cx="11247120" cy="2560320"/>
+          </a:xfrm>
+          <a:prstGeom prst="roundRect">
+            <a:avLst/>
+          </a:prstGeom>
+          <a:solidFill>
+            <a:srgbClr val="1A253C"/>
+          </a:solidFill>
+          <a:ln w="12700">
+            <a:solidFill>
+              <a:srgbClr val="2A3A55"/>
+            </a:solidFill>
+          </a:ln>
+        </p:spPr>
+        <p:style>
+          <a:lnRef idx="1">
+            <a:schemeClr val="accent1"/>
+          </a:lnRef>
+          <a:fillRef idx="3">
+            <a:schemeClr val="accent1"/>
+          </a:fillRef>
+          <a:effectRef idx="2">
+            <a:schemeClr val="accent1"/>
+          </a:effectRef>
+          <a:fontRef idx="minor">
+            <a:schemeClr val="lt1"/>
+          </a:fontRef>
+        </p:style>
+        <p:txBody>
+          <a:bodyPr rtlCol="0" anchor="ctr"/>
+          <a:lstStyle/>
+          <a:p>
+            <a:pPr algn="ctr"/>
+          </a:p>
+        </p:txBody>
+      </p:sp>
+      <p:sp>
+        <p:nvSpPr>
+          <p:cNvPr id="14" name="TextBox 13"/>
+          <p:cNvSpPr txBox="1"/>
+          <p:nvPr/>
+        </p:nvSpPr>
+        <p:spPr>
+          <a:xfrm>
+            <a:off x="640080" y="4023360"/>
+            <a:ext cx="10881360" cy="365760"/>
+          </a:xfrm>
+          <a:prstGeom prst="rect">
+            <a:avLst/>
+          </a:prstGeom>
+          <a:noFill/>
+        </p:spPr>
+        <p:txBody>
+          <a:bodyPr wrap="square">
+            <a:spAutoFit/>
+          </a:bodyPr>
+          <a:lstStyle/>
+          <a:p>
+            <a:pPr algn="l">
+              <a:defRPr sz="1600" b="1">
+                <a:solidFill>
+                  <a:srgbClr val="06B6D4"/>
+                </a:solidFill>
+                <a:latin typeface="Segoe UI"/>
+              </a:defRPr>
+            </a:pPr>
+            <a:r>
+              <a:t>📁 Project Structure</a:t>
+            </a:r>
+          </a:p>
+        </p:txBody>
+      </p:sp>
+      <p:sp>
+        <p:nvSpPr>
+          <p:cNvPr id="15" name="TextBox 14"/>
+          <p:cNvSpPr txBox="1"/>
+          <p:nvPr/>
+        </p:nvSpPr>
+        <p:spPr>
+          <a:xfrm>
+            <a:off x="640080" y="4434840"/>
+            <a:ext cx="10881360" cy="1920240"/>
+          </a:xfrm>
+          <a:prstGeom prst="rect">
+            <a:avLst/>
+          </a:prstGeom>
+          <a:noFill/>
+        </p:spPr>
+        <p:txBody>
+          <a:bodyPr wrap="square">
+            <a:spAutoFit/>
+          </a:bodyPr>
+          <a:lstStyle/>
+          <a:p>
+            <a:pPr>
+              <a:spcAft>
+                <a:spcPts val="400"/>
+              </a:spcAft>
+              <a:defRPr sz="1300" b="1">
+                <a:solidFill>
+                  <a:srgbClr val="06B6D4"/>
+                </a:solidFill>
+                <a:latin typeface="Segoe UI"/>
+              </a:defRPr>
+            </a:pPr>
+            <a:r>
+              <a:t>tools/dataset/</a:t>
+            </a:r>
+          </a:p>
+          <a:p>
+            <a:pPr>
+              <a:spcAft>
+                <a:spcPts val="400"/>
+              </a:spcAft>
+              <a:defRPr sz="1200" b="0">
+                <a:solidFill>
+                  <a:srgbClr val="CBD5E1"/>
+                </a:solidFill>
+                <a:latin typeface="Segoe UI"/>
+              </a:defRPr>
+            </a:pPr>
+            <a:r>
+              <a:t>  finetune_glm_ocr_vn_1epoch.ipynb    # Training notebook (8 steps)</a:t>
+            </a:r>
+          </a:p>
+          <a:p>
+            <a:pPr>
+              <a:spcAft>
+                <a:spcPts val="400"/>
+              </a:spcAft>
+              <a:defRPr sz="1200" b="0">
+                <a:solidFill>
+                  <a:srgbClr val="CBD5E1"/>
+                </a:solidFill>
+                <a:latin typeface="Segoe UI"/>
+              </a:defRPr>
+            </a:pPr>
+            <a:r>
+              <a:t>  generate_vietnamese_dataset_v3.py    # Synthetic data generator</a:t>
+            </a:r>
+          </a:p>
+          <a:p>
+            <a:pPr>
+              <a:spcAft>
+                <a:spcPts val="400"/>
+              </a:spcAft>
+              <a:defRPr sz="1200" b="0">
+                <a:solidFill>
+                  <a:srgbClr val="CBD5E1"/>
+                </a:solidFill>
+                <a:latin typeface="Segoe UI"/>
+              </a:defRPr>
+            </a:pPr>
+            <a:r>
+              <a:t>  crawl_vi_news.py                     # News crawler (Stage 2)</a:t>
+            </a:r>
+          </a:p>
+          <a:p>
+            <a:pPr>
+              <a:spcAft>
+                <a:spcPts val="400"/>
+              </a:spcAft>
+              <a:defRPr sz="1200" b="0">
+                <a:solidFill>
+                  <a:srgbClr val="CBD5E1"/>
+                </a:solidFill>
+                <a:latin typeface="Segoe UI"/>
+              </a:defRPr>
+            </a:pPr>
+            <a:r>
+              <a:t>  compare_models.py                    # Evaluation script</a:t>
+            </a:r>
+          </a:p>
+          <a:p>
+            <a:pPr>
+              <a:spcAft>
+                <a:spcPts val="400"/>
+              </a:spcAft>
+              <a:defRPr sz="1200" b="0">
+                <a:solidFill>
+                  <a:srgbClr val="CBD5E1"/>
+                </a:solidFill>
+                <a:latin typeface="Segoe UI"/>
+              </a:defRPr>
+            </a:pPr>
+            <a:r>
+              <a:t>  test_local.py                        # Local inference</a:t>
+            </a:r>
+          </a:p>
+          <a:p>
+            <a:pPr>
+              <a:spcAft>
+                <a:spcPts val="400"/>
+              </a:spcAft>
+              <a:defRPr sz="1200" b="0">
+                <a:solidFill>
+                  <a:srgbClr val="CBD5E1"/>
+                </a:solidFill>
+                <a:latin typeface="Segoe UI"/>
+              </a:defRPr>
+            </a:pPr>
+            <a:r>
+              <a:t>  merge_lora.py                        # LoRA merger</a:t>
+            </a:r>
+          </a:p>
+          <a:p>
+            <a:pPr>
+              <a:spcAft>
+                <a:spcPts val="400"/>
+              </a:spcAft>
+              <a:defRPr sz="1200" b="0">
+                <a:solidFill>
+                  <a:srgbClr val="CBD5E1"/>
+                </a:solidFill>
+                <a:latin typeface="Segoe UI"/>
+              </a:defRPr>
+            </a:pPr>
+            <a:r>
+              <a:t>  dictionary/                          # 35K+ Vietnamese words</a:t>
+            </a:r>
+          </a:p>
+          <a:p>
+            <a:pPr>
+              <a:spcAft>
+                <a:spcPts val="400"/>
+              </a:spcAft>
+              <a:defRPr sz="1200" b="0">
+                <a:solidFill>
+                  <a:srgbClr val="CBD5E1"/>
+                </a:solidFill>
+                <a:latin typeface="Segoe UI"/>
+              </a:defRPr>
+            </a:pPr>
+            <a:r>
+              <a:t>  font_test/                           # 58 fonts validated</a:t>
+            </a:r>
+          </a:p>
+          <a:p>
+            <a:pPr>
+              <a:spcAft>
+                <a:spcPts val="400"/>
+              </a:spcAft>
+              <a:defRPr sz="1200" b="0">
+                <a:solidFill>
+                  <a:srgbClr val="CBD5E1"/>
+                </a:solidFill>
+                <a:latin typeface="Segoe UI"/>
+              </a:defRPr>
+            </a:pPr>
+            <a:r>
+              <a:t>  vietnamese_ocr/                      # Stage 1: 100K images</a:t>
+            </a:r>
+          </a:p>
+          <a:p>
+            <a:pPr>
+              <a:spcAft>
+                <a:spcPts val="400"/>
+              </a:spcAft>
+              <a:defRPr sz="1200" b="0">
+                <a:solidFill>
+                  <a:srgbClr val="CBD5E1"/>
+                </a:solidFill>
+                <a:latin typeface="Segoe UI"/>
+              </a:defRPr>
+            </a:pPr>
+            <a:r>
+              <a:t>  vietnamese_ocr_s2/                   # Stage 2: 10K images</a:t>
             </a:r>
           </a:p>
         </p:txBody>
@@ -7519,7 +7542,7 @@
 </file>
 
 <file path=ppt/slides/slide14.xml><?xml version="1.0" encoding="utf-8"?>
-<p:sld xmlns:a="http://schemas.openxmlformats.org/drawingml/2006/main" xmlns:r="http://schemas.openxmlformats.org/officeDocument/2006/relationships" xmlns:p="http://schemas.openxmlformats.org/presentationml/2006/main">
+<p:sld xmlns:a="http://schemas.openxmlformats.org/drawingml/2006/main" xmlns:p="http://schemas.openxmlformats.org/presentationml/2006/main" xmlns:r="http://schemas.openxmlformats.org/officeDocument/2006/relationships">
   <p:cSld>
     <p:bg>
       <p:bgPr>
@@ -7535,14 +7558,7 @@
         <p:cNvGrpSpPr/>
         <p:nvPr/>
       </p:nvGrpSpPr>
-      <p:grpSpPr>
-        <a:xfrm>
-          <a:off x="0" y="0"/>
-          <a:ext cx="0" cy="0"/>
-          <a:chOff x="0" y="0"/>
-          <a:chExt cx="0" cy="0"/>
-        </a:xfrm>
-      </p:grpSpPr>
+      <p:grpSpPr/>
       <p:sp>
         <p:nvSpPr>
           <p:cNvPr id="2" name="Rectangle 1"/>
@@ -7583,7 +7599,6 @@
           <a:lstStyle/>
           <a:p>
             <a:pPr algn="ctr"/>
-            <a:endParaRPr/>
           </a:p>
         </p:txBody>
       </p:sp>
@@ -7618,7 +7633,7 @@
               </a:defRPr>
             </a:pPr>
             <a:r>
-              <a:t>KẾT LUẬN</a:t>
+              <a:t>CONCLUSION</a:t>
             </a:r>
           </a:p>
         </p:txBody>
@@ -7665,7 +7680,6 @@
           <a:lstStyle/>
           <a:p>
             <a:pPr algn="ctr"/>
-            <a:endParaRPr/>
           </a:p>
         </p:txBody>
       </p:sp>
@@ -7700,7 +7714,7 @@
               </a:defRPr>
             </a:pPr>
             <a:r>
-              <a:t>✅ Đóng góp chính</a:t>
+              <a:t>✅ Key Contributions</a:t>
             </a:r>
           </a:p>
         </p:txBody>
@@ -7739,7 +7753,7 @@
                 </a:solidFill>
                 <a:latin typeface="Segoe UI"/>
               </a:rPr>
-              <a:t>Pipeline synthetic data:</a:t>
+              <a:t>Synthetic data pipeline: </a:t>
             </a:r>
             <a:r>
               <a:rPr sz="1300">
@@ -7748,7 +7762,7 @@
                 </a:solidFill>
                 <a:latin typeface="Segoe UI"/>
               </a:rPr>
-              <a:t> 14 augmentation, 58 fonts, 7 generators, confusion pairs</a:t>
+              <a:t> 14 augmentation types, 58 fonts, 7 generators, confusion pairs</a:t>
             </a:r>
           </a:p>
           <a:p>
@@ -7764,7 +7778,7 @@
                 </a:solidFill>
                 <a:latin typeface="Segoe UI"/>
               </a:rPr>
-              <a:t>Anti-bias dual-layer:</a:t>
+              <a:t>Anti-bias dual-layer: </a:t>
             </a:r>
             <a:r>
               <a:rPr sz="1300">
@@ -7773,7 +7787,7 @@
                 </a:solidFill>
                 <a:latin typeface="Segoe UI"/>
               </a:rPr>
-              <a:t> gen_plain_words (S1) + 30% strip diacritics (S2) → giảm FP</a:t>
+              <a:t> gen_plain_words (S1) + 30% strip diacritics (S2) → reduce FP</a:t>
             </a:r>
           </a:p>
           <a:p>
@@ -7789,7 +7803,7 @@
                 </a:solidFill>
                 <a:latin typeface="Segoe UI"/>
               </a:rPr>
-              <a:t>Two-stage curriculum:</a:t>
+              <a:t>Two-stage curriculum: </a:t>
             </a:r>
             <a:r>
               <a:rPr sz="1300">
@@ -7814,7 +7828,7 @@
                 </a:solidFill>
                 <a:latin typeface="Segoe UI"/>
               </a:rPr>
-              <a:t>Đánh giá toàn diện:</a:t>
+              <a:t>Comprehensive evaluation: </a:t>
             </a:r>
             <a:r>
               <a:rPr sz="1300">
@@ -7823,7 +7837,7 @@
                 </a:solidFill>
                 <a:latin typeface="Segoe UI"/>
               </a:rPr>
-              <a:t> CER, WER, diacritic accuracy × 7 nhóm, False Positive rate</a:t>
+              <a:t> CER, WER, diacritic accuracy × 7 groups, False Positive rate</a:t>
             </a:r>
           </a:p>
           <a:p>
@@ -7839,7 +7853,7 @@
                 </a:solidFill>
                 <a:latin typeface="Segoe UI"/>
               </a:rPr>
-              <a:t>Tooling:</a:t>
+              <a:t>Tooling: </a:t>
             </a:r>
             <a:r>
               <a:rPr sz="1300">
@@ -7895,7 +7909,6 @@
           <a:lstStyle/>
           <a:p>
             <a:pPr algn="ctr"/>
-            <a:endParaRPr/>
           </a:p>
         </p:txBody>
       </p:sp>
@@ -7930,7 +7943,7 @@
               </a:defRPr>
             </a:pPr>
             <a:r>
-              <a:t>🚀 Hướng phát triển</a:t>
+              <a:t>🚀 Future Work</a:t>
             </a:r>
           </a:p>
         </p:txBody>
@@ -7969,7 +7982,7 @@
               </a:defRPr>
             </a:pPr>
             <a:r>
-              <a:t>▸  Mở rộng Table Recognition &amp; Formula Recognition cho tiếng Việt</a:t>
+              <a:t>▸  Extend to Table Recognition &amp; Formula Recognition for Vietnamese</a:t>
             </a:r>
           </a:p>
           <a:p>
@@ -7985,7 +7998,7 @@
               </a:defRPr>
             </a:pPr>
             <a:r>
-              <a:t>▸  Thu thập thêm: hóa đơn, CMND/CCCD, hợp đồng</a:t>
+              <a:t>▸  Collect more domains: invoices, ID cards, contracts</a:t>
             </a:r>
           </a:p>
           <a:p>
@@ -8001,7 +8014,7 @@
               </a:defRPr>
             </a:pPr>
             <a:r>
-              <a:t>▸  Benchmark trên dataset chuẩn (ICDAR, IIIT) cho tiếng Việt</a:t>
+              <a:t>▸  Benchmark on standard datasets (ICDAR, IIIT) for Vietnamese</a:t>
             </a:r>
           </a:p>
           <a:p>
@@ -8017,7 +8030,7 @@
               </a:defRPr>
             </a:pPr>
             <a:r>
-              <a:t>▸  So sánh với Qwen2.5-VL, PaddleOCR-VL, OlmOCR</a:t>
+              <a:t>▸  Compare with Qwen2.5-VL, PaddleOCR-VL, OlmOCR</a:t>
             </a:r>
           </a:p>
           <a:p>
@@ -8033,7 +8046,7 @@
               </a:defRPr>
             </a:pPr>
             <a:r>
-              <a:t>▸  Tối ưu inference speed cho production</a:t>
+              <a:t>▸  Optimize inference speed for production deployment</a:t>
             </a:r>
           </a:p>
         </p:txBody>
@@ -8083,7 +8096,7 @@
 </file>
 
 <file path=ppt/slides/slide15.xml><?xml version="1.0" encoding="utf-8"?>
-<p:sld xmlns:a="http://schemas.openxmlformats.org/drawingml/2006/main" xmlns:r="http://schemas.openxmlformats.org/officeDocument/2006/relationships" xmlns:p="http://schemas.openxmlformats.org/presentationml/2006/main">
+<p:sld xmlns:a="http://schemas.openxmlformats.org/drawingml/2006/main" xmlns:p="http://schemas.openxmlformats.org/presentationml/2006/main" xmlns:r="http://schemas.openxmlformats.org/officeDocument/2006/relationships">
   <p:cSld>
     <p:bg>
       <p:bgPr>
@@ -8099,14 +8112,7 @@
         <p:cNvGrpSpPr/>
         <p:nvPr/>
       </p:nvGrpSpPr>
-      <p:grpSpPr>
-        <a:xfrm>
-          <a:off x="0" y="0"/>
-          <a:ext cx="0" cy="0"/>
-          <a:chOff x="0" y="0"/>
-          <a:chExt cx="0" cy="0"/>
-        </a:xfrm>
-      </p:grpSpPr>
+      <p:grpSpPr/>
       <p:sp>
         <p:nvSpPr>
           <p:cNvPr id="2" name="Rectangle 1"/>
@@ -8147,7 +8153,6 @@
           <a:lstStyle/>
           <a:p>
             <a:pPr algn="ctr"/>
-            <a:endParaRPr/>
           </a:p>
         </p:txBody>
       </p:sp>
@@ -8182,7 +8187,7 @@
               </a:defRPr>
             </a:pPr>
             <a:r>
-              <a:t>CẢM ƠN THẦY/CÔ</a:t>
+              <a:t>THANK YOU</a:t>
             </a:r>
           </a:p>
         </p:txBody>
@@ -8218,7 +8223,7 @@
               </a:defRPr>
             </a:pPr>
             <a:r>
-              <a:t>đã lắng nghe bài thuyết trình</a:t>
+              <a:t>for your attention</a:t>
             </a:r>
           </a:p>
         </p:txBody>
@@ -8263,7 +8268,6 @@
           <a:lstStyle/>
           <a:p>
             <a:pPr algn="ctr"/>
-            <a:endParaRPr/>
           </a:p>
         </p:txBody>
       </p:sp>
@@ -8298,7 +8302,7 @@
               </a:defRPr>
             </a:pPr>
             <a:r>
-              <a:t>Nhóm thực hiện</a:t>
+              <a:t>Team Members</a:t>
             </a:r>
           </a:p>
         </p:txBody>
@@ -8337,7 +8341,7 @@
               </a:defRPr>
             </a:pPr>
             <a:r>
-              <a:t>250201052  —  Nguyễn Tuấn Dũng</a:t>
+              <a:t>250201052  —  Nguyen Tuan Dung</a:t>
             </a:r>
           </a:p>
           <a:p>
@@ -8353,7 +8357,7 @@
               </a:defRPr>
             </a:pPr>
             <a:r>
-              <a:t>250201068  —  Nguyễn Trọng Kiên</a:t>
+              <a:t>250201068  —  Nguyen Trong Kien</a:t>
             </a:r>
           </a:p>
           <a:p>
@@ -8369,7 +8373,7 @@
               </a:defRPr>
             </a:pPr>
             <a:r>
-              <a:t>250201072  —  Phạm Nhật Linh</a:t>
+              <a:t>250201072  —  Pham Nhat Linh</a:t>
             </a:r>
           </a:p>
         </p:txBody>
@@ -8419,7 +8423,7 @@
 </file>
 
 <file path=ppt/slides/slide2.xml><?xml version="1.0" encoding="utf-8"?>
-<p:sld xmlns:a="http://schemas.openxmlformats.org/drawingml/2006/main" xmlns:r="http://schemas.openxmlformats.org/officeDocument/2006/relationships" xmlns:p="http://schemas.openxmlformats.org/presentationml/2006/main">
+<p:sld xmlns:a="http://schemas.openxmlformats.org/drawingml/2006/main" xmlns:p="http://schemas.openxmlformats.org/presentationml/2006/main" xmlns:r="http://schemas.openxmlformats.org/officeDocument/2006/relationships">
   <p:cSld>
     <p:bg>
       <p:bgPr>
@@ -8435,14 +8439,7 @@
         <p:cNvGrpSpPr/>
         <p:nvPr/>
       </p:nvGrpSpPr>
-      <p:grpSpPr>
-        <a:xfrm>
-          <a:off x="0" y="0"/>
-          <a:ext cx="0" cy="0"/>
-          <a:chOff x="0" y="0"/>
-          <a:chExt cx="0" cy="0"/>
-        </a:xfrm>
-      </p:grpSpPr>
+      <p:grpSpPr/>
       <p:sp>
         <p:nvSpPr>
           <p:cNvPr id="2" name="Rectangle 1"/>
@@ -8483,7 +8480,6 @@
           <a:lstStyle/>
           <a:p>
             <a:pPr algn="ctr"/>
-            <a:endParaRPr/>
           </a:p>
         </p:txBody>
       </p:sp>
@@ -8518,7 +8514,7 @@
               </a:defRPr>
             </a:pPr>
             <a:r>
-              <a:t>NỘI DUNG TRÌNH BÀY</a:t>
+              <a:t>OUTLINE</a:t>
             </a:r>
           </a:p>
         </p:txBody>
@@ -8563,7 +8559,6 @@
           <a:lstStyle/>
           <a:p>
             <a:pPr algn="ctr"/>
-            <a:endParaRPr/>
           </a:p>
         </p:txBody>
       </p:sp>
@@ -8634,7 +8629,7 @@
               </a:defRPr>
             </a:pPr>
             <a:r>
-              <a:t>Giới thiệu &amp; Động cơ</a:t>
+              <a:t>Introduction &amp; Motivation</a:t>
             </a:r>
           </a:p>
         </p:txBody>
@@ -8679,7 +8674,6 @@
           <a:lstStyle/>
           <a:p>
             <a:pPr algn="ctr"/>
-            <a:endParaRPr/>
           </a:p>
         </p:txBody>
       </p:sp>
@@ -8723,7 +8717,6 @@
           <a:lstStyle/>
           <a:p>
             <a:pPr algn="ctr"/>
-            <a:endParaRPr/>
           </a:p>
         </p:txBody>
       </p:sp>
@@ -8794,7 +8787,7 @@
               </a:defRPr>
             </a:pPr>
             <a:r>
-              <a:t>Tổng quan về GLM-OCR</a:t>
+              <a:t>GLM-OCR Architecture</a:t>
             </a:r>
           </a:p>
         </p:txBody>
@@ -8839,7 +8832,6 @@
           <a:lstStyle/>
           <a:p>
             <a:pPr algn="ctr"/>
-            <a:endParaRPr/>
           </a:p>
         </p:txBody>
       </p:sp>
@@ -8883,7 +8875,6 @@
           <a:lstStyle/>
           <a:p>
             <a:pPr algn="ctr"/>
-            <a:endParaRPr/>
           </a:p>
         </p:txBody>
       </p:sp>
@@ -8954,7 +8945,7 @@
               </a:defRPr>
             </a:pPr>
             <a:r>
-              <a:t>Phương pháp Fine-tune</a:t>
+              <a:t>Fine-tuning Method</a:t>
             </a:r>
           </a:p>
         </p:txBody>
@@ -8999,7 +8990,6 @@
           <a:lstStyle/>
           <a:p>
             <a:pPr algn="ctr"/>
-            <a:endParaRPr/>
           </a:p>
         </p:txBody>
       </p:sp>
@@ -9043,7 +9033,6 @@
           <a:lstStyle/>
           <a:p>
             <a:pPr algn="ctr"/>
-            <a:endParaRPr/>
           </a:p>
         </p:txBody>
       </p:sp>
@@ -9114,7 +9103,7 @@
               </a:defRPr>
             </a:pPr>
             <a:r>
-              <a:t>Xây dựng dữ liệu huấn luyện</a:t>
+              <a:t>Training Data Pipeline</a:t>
             </a:r>
           </a:p>
         </p:txBody>
@@ -9159,7 +9148,6 @@
           <a:lstStyle/>
           <a:p>
             <a:pPr algn="ctr"/>
-            <a:endParaRPr/>
           </a:p>
         </p:txBody>
       </p:sp>
@@ -9203,7 +9191,6 @@
           <a:lstStyle/>
           <a:p>
             <a:pPr algn="ctr"/>
-            <a:endParaRPr/>
           </a:p>
         </p:txBody>
       </p:sp>
@@ -9274,7 +9261,7 @@
               </a:defRPr>
             </a:pPr>
             <a:r>
-              <a:t>Huấn luyện &amp; Tối ưu</a:t>
+              <a:t>Training &amp; Optimization</a:t>
             </a:r>
           </a:p>
         </p:txBody>
@@ -9319,7 +9306,6 @@
           <a:lstStyle/>
           <a:p>
             <a:pPr algn="ctr"/>
-            <a:endParaRPr/>
           </a:p>
         </p:txBody>
       </p:sp>
@@ -9363,7 +9349,6 @@
           <a:lstStyle/>
           <a:p>
             <a:pPr algn="ctr"/>
-            <a:endParaRPr/>
           </a:p>
         </p:txBody>
       </p:sp>
@@ -9434,7 +9419,7 @@
               </a:defRPr>
             </a:pPr>
             <a:r>
-              <a:t>Đánh giá &amp; Kết quả</a:t>
+              <a:t>Evaluation &amp; Results</a:t>
             </a:r>
           </a:p>
         </p:txBody>
@@ -9479,7 +9464,6 @@
           <a:lstStyle/>
           <a:p>
             <a:pPr algn="ctr"/>
-            <a:endParaRPr/>
           </a:p>
         </p:txBody>
       </p:sp>
@@ -9523,7 +9507,6 @@
           <a:lstStyle/>
           <a:p>
             <a:pPr algn="ctr"/>
-            <a:endParaRPr/>
           </a:p>
         </p:txBody>
       </p:sp>
@@ -9594,7 +9577,7 @@
               </a:defRPr>
             </a:pPr>
             <a:r>
-              <a:t>Kết luận &amp; Hướng phát triển</a:t>
+              <a:t>Conclusion &amp; Future Work</a:t>
             </a:r>
           </a:p>
         </p:txBody>
@@ -9644,7 +9627,7 @@
 </file>
 
 <file path=ppt/slides/slide3.xml><?xml version="1.0" encoding="utf-8"?>
-<p:sld xmlns:a="http://schemas.openxmlformats.org/drawingml/2006/main" xmlns:r="http://schemas.openxmlformats.org/officeDocument/2006/relationships" xmlns:p="http://schemas.openxmlformats.org/presentationml/2006/main">
+<p:sld xmlns:a="http://schemas.openxmlformats.org/drawingml/2006/main" xmlns:p="http://schemas.openxmlformats.org/presentationml/2006/main" xmlns:r="http://schemas.openxmlformats.org/officeDocument/2006/relationships">
   <p:cSld>
     <p:bg>
       <p:bgPr>
@@ -9660,14 +9643,7 @@
         <p:cNvGrpSpPr/>
         <p:nvPr/>
       </p:nvGrpSpPr>
-      <p:grpSpPr>
-        <a:xfrm>
-          <a:off x="0" y="0"/>
-          <a:ext cx="0" cy="0"/>
-          <a:chOff x="0" y="0"/>
-          <a:chExt cx="0" cy="0"/>
-        </a:xfrm>
-      </p:grpSpPr>
+      <p:grpSpPr/>
       <p:sp>
         <p:nvSpPr>
           <p:cNvPr id="2" name="Rectangle 1"/>
@@ -9708,7 +9684,6 @@
           <a:lstStyle/>
           <a:p>
             <a:pPr algn="ctr"/>
-            <a:endParaRPr/>
           </a:p>
         </p:txBody>
       </p:sp>
@@ -9743,7 +9718,7 @@
               </a:defRPr>
             </a:pPr>
             <a:r>
-              <a:t>GIỚI THIỆU &amp; ĐỘNG CƠ</a:t>
+              <a:t>INTRODUCTION &amp; MOTIVATION</a:t>
             </a:r>
           </a:p>
         </p:txBody>
@@ -9790,7 +9765,6 @@
           <a:lstStyle/>
           <a:p>
             <a:pPr algn="ctr"/>
-            <a:endParaRPr/>
           </a:p>
         </p:txBody>
       </p:sp>
@@ -9825,7 +9799,7 @@
               </a:defRPr>
             </a:pPr>
             <a:r>
-              <a:t>🔥 Thách thức OCR tiếng Việt</a:t>
+              <a:t>🔥 Vietnamese OCR Challenges</a:t>
             </a:r>
           </a:p>
         </p:txBody>
@@ -9864,7 +9838,7 @@
               </a:defRPr>
             </a:pPr>
             <a:r>
-              <a:t>▸  Hệ thống dấu thanh phức tạp: 5 thanh + dấu kép (ă, â, ê, ô, ơ, ư, đ)</a:t>
+              <a:t>▸  Complex diacritical system: 6 tones + double diacritics (ă, â, ê, ô, ơ, ư, đ)</a:t>
             </a:r>
           </a:p>
           <a:p>
@@ -9880,7 +9854,7 @@
               </a:defRPr>
             </a:pPr>
             <a:r>
-              <a:t>▸  Sai 1 dấu → đổi nghĩa hoàn toàn: ma, má, mà, mả, mã, mạ</a:t>
+              <a:t>▸  One wrong mark = different meaning: ma, má, mà, mả, mã, mạ</a:t>
             </a:r>
           </a:p>
           <a:p>
@@ -9896,7 +9870,7 @@
               </a:defRPr>
             </a:pPr>
             <a:r>
-              <a:t>▸  Mô hình hiện tại (GLM-OCR, Qwen-VL) nhận diện kém dấu Việt</a:t>
+              <a:t>▸  Current VLMs (GLM-OCR, Qwen-VL) poorly recognize Vietnamese diacritics</a:t>
             </a:r>
           </a:p>
           <a:p>
@@ -9912,7 +9886,7 @@
               </a:defRPr>
             </a:pPr>
             <a:r>
-              <a:t>▸  Thiếu dữ liệu pre-train tiếng Việt chất lượng cao</a:t>
+              <a:t>▸  Lack of high-quality Vietnamese pre-training data</a:t>
             </a:r>
           </a:p>
         </p:txBody>
@@ -9925,7 +9899,7 @@
         </p:nvSpPr>
         <p:spPr>
           <a:xfrm>
-            <a:off x="457200" y="3813048"/>
+            <a:off x="6217920" y="1097280"/>
             <a:ext cx="5486400" cy="2286000"/>
           </a:xfrm>
           <a:prstGeom prst="roundRect">
@@ -9959,7 +9933,6 @@
           <a:lstStyle/>
           <a:p>
             <a:pPr algn="ctr"/>
-            <a:endParaRPr/>
           </a:p>
         </p:txBody>
       </p:sp>
@@ -9971,7 +9944,7 @@
         </p:nvSpPr>
         <p:spPr>
           <a:xfrm>
-            <a:off x="640080" y="3904488"/>
+            <a:off x="6400800" y="1188720"/>
             <a:ext cx="5120640" cy="365760"/>
           </a:xfrm>
           <a:prstGeom prst="rect">
@@ -9994,7 +9967,7 @@
               </a:defRPr>
             </a:pPr>
             <a:r>
-              <a:t>💡 Giải pháp đề xuất</a:t>
+              <a:t>💡 Proposed Solution</a:t>
             </a:r>
           </a:p>
         </p:txBody>
@@ -10007,7 +9980,7 @@
         </p:nvSpPr>
         <p:spPr>
           <a:xfrm>
-            <a:off x="640080" y="4361688"/>
+            <a:off x="6400800" y="1645920"/>
             <a:ext cx="5120640" cy="1645920"/>
           </a:xfrm>
           <a:prstGeom prst="rect">
@@ -10033,7 +10006,7 @@
               </a:defRPr>
             </a:pPr>
             <a:r>
-              <a:t>▸  Fine-tune GLM-OCR (0.9B params) bằng LoRA</a:t>
+              <a:t>▸  Fine-tune GLM-OCR (0.9B params) with LoRA</a:t>
             </a:r>
           </a:p>
           <a:p>
@@ -10065,7 +10038,7 @@
               </a:defRPr>
             </a:pPr>
             <a:r>
-              <a:t>▸  Anti-bias: ngăn hallucination dấu</a:t>
+              <a:t>▸  Anti-bias: prevent diacritical hallucination</a:t>
             </a:r>
           </a:p>
           <a:p>
@@ -10081,7 +10054,7 @@
               </a:defRPr>
             </a:pPr>
             <a:r>
-              <a:t>▸  Pipeline hoàn chỉnh: data → train → eval → deploy</a:t>
+              <a:t>▸  Complete pipeline: data → train → eval → deploy</a:t>
             </a:r>
           </a:p>
         </p:txBody>
@@ -10102,8 +10075,8 @@
         </p:blipFill>
         <p:spPr>
           <a:xfrm>
-            <a:off x="6455664" y="1097280"/>
-            <a:ext cx="4864608" cy="5001768"/>
+            <a:off x="1371600" y="3657600"/>
+            <a:ext cx="9144000" cy="2743200"/>
           </a:xfrm>
           <a:prstGeom prst="rect">
             <a:avLst/>
@@ -10155,7 +10128,7 @@
 </file>
 
 <file path=ppt/slides/slide4.xml><?xml version="1.0" encoding="utf-8"?>
-<p:sld xmlns:a="http://schemas.openxmlformats.org/drawingml/2006/main" xmlns:r="http://schemas.openxmlformats.org/officeDocument/2006/relationships" xmlns:p="http://schemas.openxmlformats.org/presentationml/2006/main">
+<p:sld xmlns:a="http://schemas.openxmlformats.org/drawingml/2006/main" xmlns:p="http://schemas.openxmlformats.org/presentationml/2006/main" xmlns:r="http://schemas.openxmlformats.org/officeDocument/2006/relationships">
   <p:cSld>
     <p:bg>
       <p:bgPr>
@@ -10171,14 +10144,7 @@
         <p:cNvGrpSpPr/>
         <p:nvPr/>
       </p:nvGrpSpPr>
-      <p:grpSpPr>
-        <a:xfrm>
-          <a:off x="0" y="0"/>
-          <a:ext cx="0" cy="0"/>
-          <a:chOff x="0" y="0"/>
-          <a:chExt cx="0" cy="0"/>
-        </a:xfrm>
-      </p:grpSpPr>
+      <p:grpSpPr/>
       <p:sp>
         <p:nvSpPr>
           <p:cNvPr id="2" name="Rectangle 1"/>
@@ -10219,7 +10185,6 @@
           <a:lstStyle/>
           <a:p>
             <a:pPr algn="ctr"/>
-            <a:endParaRPr/>
           </a:p>
         </p:txBody>
       </p:sp>
@@ -10254,7 +10219,7 @@
               </a:defRPr>
             </a:pPr>
             <a:r>
-              <a:t>TÌNH HÌNH NGHIÊN CỨU VLM CHO OCR</a:t>
+              <a:t>VLM LANDSCAPE FOR OCR</a:t>
             </a:r>
           </a:p>
         </p:txBody>
@@ -10278,34 +10243,10 @@
                 <a:tableStyleId>{5C22544A-7EE6-4342-B048-85BDC9FD1C3A}</a:tableStyleId>
               </a:tblPr>
               <a:tblGrid>
-                <a:gridCol w="2024481">
-                  <a:extLst>
-                    <a:ext uri="{9D8B030D-6E8A-4147-A177-3AD203B41FA5}">
-                      <a16:colId xmlns:a16="http://schemas.microsoft.com/office/drawing/2014/main" val="20000"/>
-                    </a:ext>
-                  </a:extLst>
-                </a:gridCol>
-                <a:gridCol w="3149193">
-                  <a:extLst>
-                    <a:ext uri="{9D8B030D-6E8A-4147-A177-3AD203B41FA5}">
-                      <a16:colId xmlns:a16="http://schemas.microsoft.com/office/drawing/2014/main" val="20001"/>
-                    </a:ext>
-                  </a:extLst>
-                </a:gridCol>
-                <a:gridCol w="1349654">
-                  <a:extLst>
-                    <a:ext uri="{9D8B030D-6E8A-4147-A177-3AD203B41FA5}">
-                      <a16:colId xmlns:a16="http://schemas.microsoft.com/office/drawing/2014/main" val="20002"/>
-                    </a:ext>
-                  </a:extLst>
-                </a:gridCol>
-                <a:gridCol w="4723790">
-                  <a:extLst>
-                    <a:ext uri="{9D8B030D-6E8A-4147-A177-3AD203B41FA5}">
-                      <a16:colId xmlns:a16="http://schemas.microsoft.com/office/drawing/2014/main" val="20003"/>
-                    </a:ext>
-                  </a:extLst>
-                </a:gridCol>
+                <a:gridCol w="2024481"/>
+                <a:gridCol w="3149193"/>
+                <a:gridCol w="1349654"/>
+                <a:gridCol w="4723790"/>
               </a:tblGrid>
               <a:tr h="402336">
                 <a:tc>
@@ -10322,7 +10263,7 @@
                         </a:defRPr>
                       </a:pPr>
                       <a:r>
-                        <a:t>Loại mô hình</a:t>
+                        <a:t>Model Type</a:t>
                       </a:r>
                     </a:p>
                   </a:txBody>
@@ -10346,7 +10287,7 @@
                         </a:defRPr>
                       </a:pPr>
                       <a:r>
-                        <a:t>Ví dụ tiêu biểu</a:t>
+                        <a:t>Examples</a:t>
                       </a:r>
                     </a:p>
                   </a:txBody>
@@ -10394,7 +10335,7 @@
                         </a:defRPr>
                       </a:pPr>
                       <a:r>
-                        <a:t>Đặc điểm chính</a:t>
+                        <a:t>Key Characteristics</a:t>
                       </a:r>
                     </a:p>
                   </a:txBody>
@@ -10404,11 +10345,6 @@
                     </a:solidFill>
                   </a:tcPr>
                 </a:tc>
-                <a:extLst>
-                  <a:ext uri="{0D108BD9-81ED-4DB2-BD59-A6C34878D82A}">
-                    <a16:rowId xmlns:a16="http://schemas.microsoft.com/office/drawing/2014/main" val="10000"/>
-                  </a:ext>
-                </a:extLst>
               </a:tr>
               <a:tr h="402336">
                 <a:tc>
@@ -10425,7 +10361,7 @@
                         </a:defRPr>
                       </a:pPr>
                       <a:r>
-                        <a:t>OCR truyền thống</a:t>
+                        <a:t>Traditional OCR</a:t>
                       </a:r>
                     </a:p>
                   </a:txBody>
@@ -10507,11 +10443,6 @@
                     </a:solidFill>
                   </a:tcPr>
                 </a:tc>
-                <a:extLst>
-                  <a:ext uri="{0D108BD9-81ED-4DB2-BD59-A6C34878D82A}">
-                    <a16:rowId xmlns:a16="http://schemas.microsoft.com/office/drawing/2014/main" val="10001"/>
-                  </a:ext>
-                </a:extLst>
               </a:tr>
               <a:tr h="402336">
                 <a:tc>
@@ -10528,7 +10459,7 @@
                         </a:defRPr>
                       </a:pPr>
                       <a:r>
-                        <a:t>VLM Tổng quát</a:t>
+                        <a:t>Generalist VLM</a:t>
                       </a:r>
                     </a:p>
                   </a:txBody>
@@ -10600,7 +10531,7 @@
                         </a:defRPr>
                       </a:pPr>
                       <a:r>
-                        <a:t>Reasoning mạnh, context dài, tốn tài nguyên</a:t>
+                        <a:t>Strong reasoning, long context, resource-heavy</a:t>
                       </a:r>
                     </a:p>
                   </a:txBody>
@@ -10610,11 +10541,6 @@
                     </a:solidFill>
                   </a:tcPr>
                 </a:tc>
-                <a:extLst>
-                  <a:ext uri="{0D108BD9-81ED-4DB2-BD59-A6C34878D82A}">
-                    <a16:rowId xmlns:a16="http://schemas.microsoft.com/office/drawing/2014/main" val="10002"/>
-                  </a:ext>
-                </a:extLst>
               </a:tr>
               <a:tr h="402336">
                 <a:tc>
@@ -10631,7 +10557,7 @@
                         </a:defRPr>
                       </a:pPr>
                       <a:r>
-                        <a:t>VLM chuyên OCR</a:t>
+                        <a:t>Specialized OCR VLM</a:t>
                       </a:r>
                     </a:p>
                   </a:txBody>
@@ -10703,7 +10629,7 @@
                         </a:defRPr>
                       </a:pPr>
                       <a:r>
-                        <a:t>Tối ưu text extraction, output có cấu trúc</a:t>
+                        <a:t>Optimized text extraction, structured output</a:t>
                       </a:r>
                     </a:p>
                   </a:txBody>
@@ -10713,11 +10639,6 @@
                     </a:solidFill>
                   </a:tcPr>
                 </a:tc>
-                <a:extLst>
-                  <a:ext uri="{0D108BD9-81ED-4DB2-BD59-A6C34878D82A}">
-                    <a16:rowId xmlns:a16="http://schemas.microsoft.com/office/drawing/2014/main" val="10003"/>
-                  </a:ext>
-                </a:extLst>
               </a:tr>
               <a:tr h="402336">
                 <a:tc>
@@ -10806,7 +10727,7 @@
                         </a:defRPr>
                       </a:pPr>
                       <a:r>
-                        <a:t>Edge deployment, hiệu quả tính toán</a:t>
+                        <a:t>Edge deployment, compute-efficient</a:t>
                       </a:r>
                     </a:p>
                   </a:txBody>
@@ -10816,11 +10737,6 @@
                     </a:solidFill>
                   </a:tcPr>
                 </a:tc>
-                <a:extLst>
-                  <a:ext uri="{0D108BD9-81ED-4DB2-BD59-A6C34878D82A}">
-                    <a16:rowId xmlns:a16="http://schemas.microsoft.com/office/drawing/2014/main" val="10004"/>
-                  </a:ext>
-                </a:extLst>
               </a:tr>
             </a:tbl>
           </a:graphicData>
@@ -10834,7 +10750,7 @@
         </p:nvSpPr>
         <p:spPr>
           <a:xfrm>
-            <a:off x="457198" y="4553712"/>
+            <a:off x="457200" y="3383280"/>
             <a:ext cx="11247120" cy="1097280"/>
           </a:xfrm>
           <a:prstGeom prst="roundRect">
@@ -10868,7 +10784,6 @@
           <a:lstStyle/>
           <a:p>
             <a:pPr algn="ctr"/>
-            <a:endParaRPr/>
           </a:p>
         </p:txBody>
       </p:sp>
@@ -10880,7 +10795,7 @@
         </p:nvSpPr>
         <p:spPr>
           <a:xfrm>
-            <a:off x="640078" y="4645152"/>
+            <a:off x="640080" y="3474720"/>
             <a:ext cx="10881360" cy="914400"/>
           </a:xfrm>
           <a:prstGeom prst="rect">
@@ -10903,7 +10818,7 @@
               </a:defRPr>
             </a:pPr>
             <a:r>
-              <a:t>📌 Lựa chọn: GLM-OCR (0.9B) — cân bằng tốt giữa hiệu năng &amp; hiệu quả, phù hợp fine-tune trên Colab T4. Mô hình có MTP (Multi-Token Prediction) tăng 50% inference throughput, kiến trúc 3 phần rõ ràng cho phép freeze/unfreeze linh hoạt.</a:t>
+              <a:t>📌 Choice: GLM-OCR (0.9B) — best balance of performance &amp; efficiency, suitable for fine-tuning on Colab T4. Features MTP (Multi-Token Prediction) for 50% faster inference, clear 3-component architecture enables flexible freeze/unfreeze.</a:t>
             </a:r>
           </a:p>
         </p:txBody>
@@ -10953,7 +10868,7 @@
 </file>
 
 <file path=ppt/slides/slide5.xml><?xml version="1.0" encoding="utf-8"?>
-<p:sld xmlns:a="http://schemas.openxmlformats.org/drawingml/2006/main" xmlns:r="http://schemas.openxmlformats.org/officeDocument/2006/relationships" xmlns:p="http://schemas.openxmlformats.org/presentationml/2006/main">
+<p:sld xmlns:a="http://schemas.openxmlformats.org/drawingml/2006/main" xmlns:p="http://schemas.openxmlformats.org/presentationml/2006/main" xmlns:r="http://schemas.openxmlformats.org/officeDocument/2006/relationships">
   <p:cSld>
     <p:bg>
       <p:bgPr>
@@ -10969,14 +10884,7 @@
         <p:cNvGrpSpPr/>
         <p:nvPr/>
       </p:nvGrpSpPr>
-      <p:grpSpPr>
-        <a:xfrm>
-          <a:off x="0" y="0"/>
-          <a:ext cx="0" cy="0"/>
-          <a:chOff x="0" y="0"/>
-          <a:chExt cx="0" cy="0"/>
-        </a:xfrm>
-      </p:grpSpPr>
+      <p:grpSpPr/>
       <p:sp>
         <p:nvSpPr>
           <p:cNvPr id="2" name="Rectangle 1"/>
@@ -11017,7 +10925,6 @@
           <a:lstStyle/>
           <a:p>
             <a:pPr algn="ctr"/>
-            <a:endParaRPr/>
           </a:p>
         </p:txBody>
       </p:sp>
@@ -11052,7 +10959,7 @@
               </a:defRPr>
             </a:pPr>
             <a:r>
-              <a:t>KIẾN TRÚC GLM-OCR</a:t>
+              <a:t>GLM-OCR ARCHITECTURE</a:t>
             </a:r>
           </a:p>
         </p:txBody>
@@ -11074,7 +10981,7 @@
         <p:spPr>
           <a:xfrm>
             <a:off x="457200" y="1005840"/>
-            <a:ext cx="6784848" cy="4654296"/>
+            <a:ext cx="11247120" cy="3200400"/>
           </a:xfrm>
           <a:prstGeom prst="rect">
             <a:avLst/>
@@ -11089,7 +10996,7 @@
         </p:nvSpPr>
         <p:spPr>
           <a:xfrm>
-            <a:off x="8138160" y="91440"/>
+            <a:off x="457200" y="4389120"/>
             <a:ext cx="3474720" cy="2103120"/>
           </a:xfrm>
           <a:prstGeom prst="roundRect">
@@ -11123,7 +11030,6 @@
           <a:lstStyle/>
           <a:p>
             <a:pPr algn="ctr"/>
-            <a:endParaRPr/>
           </a:p>
         </p:txBody>
       </p:sp>
@@ -11135,7 +11041,7 @@
         </p:nvSpPr>
         <p:spPr>
           <a:xfrm>
-            <a:off x="8321040" y="182880"/>
+            <a:off x="640080" y="4480560"/>
             <a:ext cx="3108960" cy="548640"/>
           </a:xfrm>
           <a:prstGeom prst="rect">
@@ -11171,7 +11077,7 @@
         </p:nvSpPr>
         <p:spPr>
           <a:xfrm>
-            <a:off x="8321040" y="685800"/>
+            <a:off x="640080" y="4983480"/>
             <a:ext cx="3108960" cy="274320"/>
           </a:xfrm>
           <a:prstGeom prst="rect">
@@ -11207,7 +11113,7 @@
         </p:nvSpPr>
         <p:spPr>
           <a:xfrm>
-            <a:off x="8321040" y="1005840"/>
+            <a:off x="640080" y="5303520"/>
             <a:ext cx="3108960" cy="1097280"/>
           </a:xfrm>
           <a:prstGeom prst="rect">
@@ -11251,7 +11157,7 @@
         </p:nvSpPr>
         <p:spPr>
           <a:xfrm>
-            <a:off x="8138160" y="2278380"/>
+            <a:off x="4297680" y="4389120"/>
             <a:ext cx="3474720" cy="2103120"/>
           </a:xfrm>
           <a:prstGeom prst="roundRect">
@@ -11285,7 +11191,6 @@
           <a:lstStyle/>
           <a:p>
             <a:pPr algn="ctr"/>
-            <a:endParaRPr/>
           </a:p>
         </p:txBody>
       </p:sp>
@@ -11297,7 +11202,7 @@
         </p:nvSpPr>
         <p:spPr>
           <a:xfrm>
-            <a:off x="8321040" y="2369820"/>
+            <a:off x="4480560" y="4480560"/>
             <a:ext cx="3108960" cy="548640"/>
           </a:xfrm>
           <a:prstGeom prst="rect">
@@ -11337,7 +11242,7 @@
         </p:nvSpPr>
         <p:spPr>
           <a:xfrm>
-            <a:off x="8321040" y="2872740"/>
+            <a:off x="4480560" y="4983480"/>
             <a:ext cx="3108960" cy="274320"/>
           </a:xfrm>
           <a:prstGeom prst="rect">
@@ -11373,7 +11278,7 @@
         </p:nvSpPr>
         <p:spPr>
           <a:xfrm>
-            <a:off x="8321040" y="3192780"/>
+            <a:off x="4480560" y="5303520"/>
             <a:ext cx="3108960" cy="1097280"/>
           </a:xfrm>
           <a:prstGeom prst="rect">
@@ -11404,7 +11309,7 @@
             </a:r>
             <a:br/>
             <a:r>
-              <a:t>Unfreeze khi fine-tune</a:t>
+              <a:t>Unfrozen during fine-tune</a:t>
             </a:r>
           </a:p>
         </p:txBody>
@@ -11417,7 +11322,7 @@
         </p:nvSpPr>
         <p:spPr>
           <a:xfrm>
-            <a:off x="8138160" y="4480560"/>
+            <a:off x="8138160" y="4389120"/>
             <a:ext cx="3474720" cy="2103120"/>
           </a:xfrm>
           <a:prstGeom prst="roundRect">
@@ -11451,7 +11356,6 @@
           <a:lstStyle/>
           <a:p>
             <a:pPr algn="ctr"/>
-            <a:endParaRPr/>
           </a:p>
         </p:txBody>
       </p:sp>
@@ -11463,7 +11367,7 @@
         </p:nvSpPr>
         <p:spPr>
           <a:xfrm>
-            <a:off x="8321040" y="4572000"/>
+            <a:off x="8321040" y="4480560"/>
             <a:ext cx="3108960" cy="548640"/>
           </a:xfrm>
           <a:prstGeom prst="rect">
@@ -11499,7 +11403,7 @@
         </p:nvSpPr>
         <p:spPr>
           <a:xfrm>
-            <a:off x="8321040" y="5074920"/>
+            <a:off x="8321040" y="4983480"/>
             <a:ext cx="3108960" cy="274320"/>
           </a:xfrm>
           <a:prstGeom prst="rect">
@@ -11535,7 +11439,7 @@
         </p:nvSpPr>
         <p:spPr>
           <a:xfrm>
-            <a:off x="8321040" y="5394960"/>
+            <a:off x="8321040" y="5303520"/>
             <a:ext cx="3108960" cy="1097280"/>
           </a:xfrm>
           <a:prstGeom prst="rect">
@@ -11616,7 +11520,7 @@
 </file>
 
 <file path=ppt/slides/slide6.xml><?xml version="1.0" encoding="utf-8"?>
-<p:sld xmlns:a="http://schemas.openxmlformats.org/drawingml/2006/main" xmlns:r="http://schemas.openxmlformats.org/officeDocument/2006/relationships" xmlns:p="http://schemas.openxmlformats.org/presentationml/2006/main">
+<p:sld xmlns:a="http://schemas.openxmlformats.org/drawingml/2006/main" xmlns:p="http://schemas.openxmlformats.org/presentationml/2006/main" xmlns:r="http://schemas.openxmlformats.org/officeDocument/2006/relationships">
   <p:cSld>
     <p:bg>
       <p:bgPr>
@@ -11632,14 +11536,7 @@
         <p:cNvGrpSpPr/>
         <p:nvPr/>
       </p:nvGrpSpPr>
-      <p:grpSpPr>
-        <a:xfrm>
-          <a:off x="0" y="0"/>
-          <a:ext cx="0" cy="0"/>
-          <a:chOff x="0" y="0"/>
-          <a:chExt cx="0" cy="0"/>
-        </a:xfrm>
-      </p:grpSpPr>
+      <p:grpSpPr/>
       <p:sp>
         <p:nvSpPr>
           <p:cNvPr id="2" name="Rectangle 1"/>
@@ -11680,7 +11577,6 @@
           <a:lstStyle/>
           <a:p>
             <a:pPr algn="ctr"/>
-            <a:endParaRPr/>
           </a:p>
         </p:txBody>
       </p:sp>
@@ -11715,7 +11611,7 @@
               </a:defRPr>
             </a:pPr>
             <a:r>
-              <a:t>PHƯƠNG PHÁP LoRA</a:t>
+              <a:t>LoRA FINE-TUNING METHOD</a:t>
             </a:r>
           </a:p>
         </p:txBody>
@@ -11736,8 +11632,8 @@
         </p:blipFill>
         <p:spPr>
           <a:xfrm>
-            <a:off x="457200" y="704088"/>
-            <a:ext cx="5029200" cy="3685032"/>
+            <a:off x="457200" y="914400"/>
+            <a:ext cx="5029200" cy="2926080"/>
           </a:xfrm>
           <a:prstGeom prst="rect">
             <a:avLst/>
@@ -11786,7 +11682,6 @@
           <a:lstStyle/>
           <a:p>
             <a:pPr algn="ctr"/>
-            <a:endParaRPr/>
           </a:p>
         </p:txBody>
       </p:sp>
@@ -11821,7 +11716,7 @@
               </a:defRPr>
             </a:pPr>
             <a:r>
-              <a:t>Cấu hình LoRA</a:t>
+              <a:t>LoRA Configuration</a:t>
             </a:r>
           </a:p>
         </p:txBody>
@@ -11860,7 +11755,7 @@
               </a:defRPr>
             </a:pPr>
             <a:r>
-              <a:t>h = Wx + ΔWx  =  Wx + BAx</a:t>
+              <a:t>h = Wx + ΔWx = Wx + BAx</a:t>
             </a:r>
           </a:p>
           <a:p>
@@ -11875,7 +11770,6 @@
                 <a:latin typeface="Segoe UI"/>
               </a:defRPr>
             </a:pPr>
-            <a:endParaRPr/>
           </a:p>
           <a:p>
             <a:pPr>
@@ -11937,7 +11831,6 @@
                 <a:latin typeface="Segoe UI"/>
               </a:defRPr>
             </a:pPr>
-            <a:endParaRPr/>
           </a:p>
           <a:p>
             <a:pPr>
@@ -11968,7 +11861,7 @@
               </a:defRPr>
             </a:pPr>
             <a:r>
-              <a:t>VRAM: chỉ cần ~7 GB (T4 16 GB)</a:t>
+              <a:t>VRAM: only ~7 GB (T4 16 GB)</a:t>
             </a:r>
           </a:p>
         </p:txBody>
@@ -11981,7 +11874,7 @@
         </p:nvSpPr>
         <p:spPr>
           <a:xfrm>
-            <a:off x="457200" y="4480560"/>
+            <a:off x="457200" y="4297680"/>
             <a:ext cx="11247120" cy="914400"/>
           </a:xfrm>
           <a:prstGeom prst="roundRect">
@@ -12015,7 +11908,6 @@
           <a:lstStyle/>
           <a:p>
             <a:pPr algn="ctr"/>
-            <a:endParaRPr/>
           </a:p>
         </p:txBody>
       </p:sp>
@@ -12027,7 +11919,7 @@
         </p:nvSpPr>
         <p:spPr>
           <a:xfrm>
-            <a:off x="640080" y="4572000"/>
+            <a:off x="640080" y="4389120"/>
             <a:ext cx="10881360" cy="731520"/>
           </a:xfrm>
           <a:prstGeom prst="rect">
@@ -12050,168 +11942,7 @@
               </a:defRPr>
             </a:pPr>
             <a:r>
-              <a:rPr dirty="0"/>
-              <a:t>🔑  Freeze </a:t>
-            </a:r>
-            <a:r>
-              <a:rPr dirty="0" err="1"/>
-              <a:t>ViT</a:t>
-            </a:r>
-            <a:r>
-              <a:rPr dirty="0"/>
-              <a:t> + Unfreeze Projector → </a:t>
-            </a:r>
-            <a:r>
-              <a:rPr dirty="0" err="1"/>
-              <a:t>Xây</a:t>
-            </a:r>
-            <a:r>
-              <a:rPr dirty="0"/>
-              <a:t> </a:t>
-            </a:r>
-            <a:r>
-              <a:rPr dirty="0" err="1"/>
-              <a:t>dựng</a:t>
-            </a:r>
-            <a:r>
-              <a:rPr dirty="0"/>
-              <a:t> "</a:t>
-            </a:r>
-            <a:r>
-              <a:rPr dirty="0" err="1"/>
-              <a:t>từ</a:t>
-            </a:r>
-            <a:r>
-              <a:rPr dirty="0"/>
-              <a:t> </a:t>
-            </a:r>
-            <a:r>
-              <a:rPr dirty="0" err="1"/>
-              <a:t>điển</a:t>
-            </a:r>
-            <a:r>
-              <a:rPr dirty="0"/>
-              <a:t> </a:t>
-            </a:r>
-            <a:r>
-              <a:rPr dirty="0" err="1"/>
-              <a:t>thị</a:t>
-            </a:r>
-            <a:r>
-              <a:rPr dirty="0"/>
-              <a:t> </a:t>
-            </a:r>
-            <a:r>
-              <a:rPr dirty="0" err="1"/>
-              <a:t>giác</a:t>
-            </a:r>
-            <a:r>
-              <a:rPr dirty="0"/>
-              <a:t>" </a:t>
-            </a:r>
-            <a:r>
-              <a:rPr dirty="0" err="1"/>
-              <a:t>mới</a:t>
-            </a:r>
-            <a:r>
-              <a:rPr dirty="0"/>
-              <a:t> </a:t>
-            </a:r>
-            <a:r>
-              <a:rPr dirty="0" err="1"/>
-              <a:t>cho</a:t>
-            </a:r>
-            <a:r>
-              <a:rPr dirty="0"/>
-              <a:t> </a:t>
-            </a:r>
-            <a:r>
-              <a:rPr dirty="0" err="1"/>
-              <a:t>dấu</a:t>
-            </a:r>
-            <a:r>
-              <a:rPr dirty="0"/>
-              <a:t> Việt </a:t>
-            </a:r>
-            <a:r>
-              <a:rPr dirty="0" err="1"/>
-              <a:t>mà</a:t>
-            </a:r>
-            <a:r>
-              <a:rPr dirty="0"/>
-              <a:t> </a:t>
-            </a:r>
-            <a:r>
-              <a:rPr dirty="0" err="1"/>
-              <a:t>không</a:t>
-            </a:r>
-            <a:r>
-              <a:rPr dirty="0"/>
-              <a:t> </a:t>
-            </a:r>
-            <a:r>
-              <a:rPr dirty="0" err="1"/>
-              <a:t>mất</a:t>
-            </a:r>
-            <a:r>
-              <a:rPr dirty="0"/>
-              <a:t> </a:t>
-            </a:r>
-            <a:r>
-              <a:rPr dirty="0" err="1"/>
-              <a:t>kiến</a:t>
-            </a:r>
-            <a:r>
-              <a:rPr dirty="0"/>
-              <a:t> </a:t>
-            </a:r>
-            <a:r>
-              <a:rPr dirty="0" err="1"/>
-              <a:t>thức</a:t>
-            </a:r>
-            <a:r>
-              <a:rPr dirty="0"/>
-              <a:t> </a:t>
-            </a:r>
-            <a:r>
-              <a:rPr dirty="0" err="1"/>
-              <a:t>thị</a:t>
-            </a:r>
-            <a:r>
-              <a:rPr dirty="0"/>
-              <a:t> </a:t>
-            </a:r>
-            <a:r>
-              <a:rPr dirty="0" err="1"/>
-              <a:t>giác</a:t>
-            </a:r>
-            <a:r>
-              <a:rPr dirty="0"/>
-              <a:t> pre-train. Projector </a:t>
-            </a:r>
-            <a:r>
-              <a:rPr dirty="0" err="1"/>
-              <a:t>ánh</a:t>
-            </a:r>
-            <a:r>
-              <a:rPr dirty="0"/>
-              <a:t> </a:t>
-            </a:r>
-            <a:r>
-              <a:rPr dirty="0" err="1"/>
-              <a:t>xạ</a:t>
-            </a:r>
-            <a:r>
-              <a:rPr dirty="0"/>
-              <a:t> visual features → </a:t>
-            </a:r>
-            <a:r>
-              <a:rPr dirty="0" err="1"/>
-              <a:t>nhiều</a:t>
-            </a:r>
-            <a:r>
-              <a:rPr dirty="0"/>
-              <a:t> tokens ("Nguyễn" = 3 tokens).</a:t>
+              <a:t>🔑  Freeze ViT + Unfreeze Projector → Build new "visual dictionary" for Vietnamese diacritics without losing pre-trained visual knowledge. Projector maps visual features → multiple tokens ("Nguyen" = 3 tokens).</a:t>
             </a:r>
           </a:p>
         </p:txBody>
@@ -12258,7 +11989,6 @@
           <a:lstStyle/>
           <a:p>
             <a:pPr algn="ctr"/>
-            <a:endParaRPr/>
           </a:p>
         </p:txBody>
       </p:sp>
@@ -12344,7 +12074,6 @@
           <a:lstStyle/>
           <a:p>
             <a:pPr algn="ctr"/>
-            <a:endParaRPr/>
           </a:p>
         </p:txBody>
       </p:sp>
@@ -12433,7 +12162,7 @@
 </file>
 
 <file path=ppt/slides/slide7.xml><?xml version="1.0" encoding="utf-8"?>
-<p:sld xmlns:a="http://schemas.openxmlformats.org/drawingml/2006/main" xmlns:r="http://schemas.openxmlformats.org/officeDocument/2006/relationships" xmlns:p="http://schemas.openxmlformats.org/presentationml/2006/main">
+<p:sld xmlns:a="http://schemas.openxmlformats.org/drawingml/2006/main" xmlns:p="http://schemas.openxmlformats.org/presentationml/2006/main" xmlns:r="http://schemas.openxmlformats.org/officeDocument/2006/relationships">
   <p:cSld>
     <p:bg>
       <p:bgPr>
@@ -12449,14 +12178,7 @@
         <p:cNvGrpSpPr/>
         <p:nvPr/>
       </p:nvGrpSpPr>
-      <p:grpSpPr>
-        <a:xfrm>
-          <a:off x="0" y="0"/>
-          <a:ext cx="0" cy="0"/>
-          <a:chOff x="0" y="0"/>
-          <a:chExt cx="0" cy="0"/>
-        </a:xfrm>
-      </p:grpSpPr>
+      <p:grpSpPr/>
       <p:sp>
         <p:nvSpPr>
           <p:cNvPr id="2" name="Rectangle 1"/>
@@ -12497,7 +12219,6 @@
           <a:lstStyle/>
           <a:p>
             <a:pPr algn="ctr"/>
-            <a:endParaRPr/>
           </a:p>
         </p:txBody>
       </p:sp>
@@ -12532,7 +12253,7 @@
               </a:defRPr>
             </a:pPr>
             <a:r>
-              <a:t>XÂY DỰNG DỮ LIỆU HUẤN LUYỆN</a:t>
+              <a:t>TRAINING DATA PIPELINE</a:t>
             </a:r>
           </a:p>
         </p:txBody>
@@ -12553,8 +12274,8 @@
         </p:blipFill>
         <p:spPr>
           <a:xfrm>
-            <a:off x="3543300" y="822960"/>
-            <a:ext cx="4800600" cy="2743200"/>
+            <a:off x="457200" y="914400"/>
+            <a:ext cx="11247120" cy="2743200"/>
           </a:xfrm>
           <a:prstGeom prst="rect">
             <a:avLst/>
@@ -12603,7 +12324,6 @@
           <a:lstStyle/>
           <a:p>
             <a:pPr algn="ctr"/>
-            <a:endParaRPr/>
           </a:p>
         </p:txBody>
       </p:sp>
@@ -12677,7 +12397,7 @@
               </a:defRPr>
             </a:pPr>
             <a:r>
-              <a:t>▸  35.501 từ điển + 3.544 từ khó (dấu kép)</a:t>
+              <a:t>▸  35,501 dictionary words + 3,544 hard words</a:t>
             </a:r>
           </a:p>
           <a:p>
@@ -12693,7 +12413,7 @@
               </a:defRPr>
             </a:pPr>
             <a:r>
-              <a:t>▸  58 font Windows đã verify</a:t>
+              <a:t>▸  58 verified Windows fonts</a:t>
             </a:r>
           </a:p>
           <a:p>
@@ -12709,7 +12429,7 @@
               </a:defRPr>
             </a:pPr>
             <a:r>
-              <a:t>▸  7 loại mẫu sinh đa dạng</a:t>
+              <a:t>▸  7 diverse sample generators</a:t>
             </a:r>
           </a:p>
           <a:p>
@@ -12788,7 +12508,6 @@
           <a:lstStyle/>
           <a:p>
             <a:pPr algn="ctr"/>
-            <a:endParaRPr/>
           </a:p>
         </p:txBody>
       </p:sp>
@@ -12862,7 +12581,7 @@
               </a:defRPr>
             </a:pPr>
             <a:r>
-              <a:t>▸  15 RSS feeds: VNExpress, Tuổi Trẻ, Thanh Niên</a:t>
+              <a:t>▸  15 RSS feeds: VNExpress, Tuoi Tre, Thanh Nien</a:t>
             </a:r>
           </a:p>
           <a:p>
@@ -12910,7 +12629,7 @@
               </a:defRPr>
             </a:pPr>
             <a:r>
-              <a:t>▸  Augmentation nhẹ: blur, noise, jpeg, rotate</a:t>
+              <a:t>▸  Light augmentation: blur, noise, jpeg, rotate</a:t>
             </a:r>
           </a:p>
           <a:p>
@@ -12976,7 +12695,7 @@
 </file>
 
 <file path=ppt/slides/slide8.xml><?xml version="1.0" encoding="utf-8"?>
-<p:sld xmlns:a="http://schemas.openxmlformats.org/drawingml/2006/main" xmlns:r="http://schemas.openxmlformats.org/officeDocument/2006/relationships" xmlns:p="http://schemas.openxmlformats.org/presentationml/2006/main">
+<p:sld xmlns:a="http://schemas.openxmlformats.org/drawingml/2006/main" xmlns:p="http://schemas.openxmlformats.org/presentationml/2006/main" xmlns:r="http://schemas.openxmlformats.org/officeDocument/2006/relationships">
   <p:cSld>
     <p:bg>
       <p:bgPr>
@@ -12992,14 +12711,7 @@
         <p:cNvGrpSpPr/>
         <p:nvPr/>
       </p:nvGrpSpPr>
-      <p:grpSpPr>
-        <a:xfrm>
-          <a:off x="0" y="0"/>
-          <a:ext cx="0" cy="0"/>
-          <a:chOff x="0" y="0"/>
-          <a:chExt cx="0" cy="0"/>
-        </a:xfrm>
-      </p:grpSpPr>
+      <p:grpSpPr/>
       <p:sp>
         <p:nvSpPr>
           <p:cNvPr id="2" name="Rectangle 1"/>
@@ -13040,7 +12752,6 @@
           <a:lstStyle/>
           <a:p>
             <a:pPr algn="ctr"/>
-            <a:endParaRPr/>
           </a:p>
         </p:txBody>
       </p:sp>
@@ -13075,7 +12786,7 @@
               </a:defRPr>
             </a:pPr>
             <a:r>
-              <a:t>7 LOẠI MẪU SINH DỮ LIỆU</a:t>
+              <a:t>7 SAMPLE GENERATORS</a:t>
             </a:r>
           </a:p>
         </p:txBody>
@@ -13099,41 +12810,11 @@
                 <a:tableStyleId>{5C22544A-7EE6-4342-B048-85BDC9FD1C3A}</a:tableStyleId>
               </a:tblPr>
               <a:tblGrid>
-                <a:gridCol w="562356">
-                  <a:extLst>
-                    <a:ext uri="{9D8B030D-6E8A-4147-A177-3AD203B41FA5}">
-                      <a16:colId xmlns:a16="http://schemas.microsoft.com/office/drawing/2014/main" val="20000"/>
-                    </a:ext>
-                  </a:extLst>
-                </a:gridCol>
-                <a:gridCol w="2024481">
-                  <a:extLst>
-                    <a:ext uri="{9D8B030D-6E8A-4147-A177-3AD203B41FA5}">
-                      <a16:colId xmlns:a16="http://schemas.microsoft.com/office/drawing/2014/main" val="20001"/>
-                    </a:ext>
-                  </a:extLst>
-                </a:gridCol>
-                <a:gridCol w="787298">
-                  <a:extLst>
-                    <a:ext uri="{9D8B030D-6E8A-4147-A177-3AD203B41FA5}">
-                      <a16:colId xmlns:a16="http://schemas.microsoft.com/office/drawing/2014/main" val="20002"/>
-                    </a:ext>
-                  </a:extLst>
-                </a:gridCol>
-                <a:gridCol w="3936491">
-                  <a:extLst>
-                    <a:ext uri="{9D8B030D-6E8A-4147-A177-3AD203B41FA5}">
-                      <a16:colId xmlns:a16="http://schemas.microsoft.com/office/drawing/2014/main" val="20003"/>
-                    </a:ext>
-                  </a:extLst>
-                </a:gridCol>
-                <a:gridCol w="3936491">
-                  <a:extLst>
-                    <a:ext uri="{9D8B030D-6E8A-4147-A177-3AD203B41FA5}">
-                      <a16:colId xmlns:a16="http://schemas.microsoft.com/office/drawing/2014/main" val="20004"/>
-                    </a:ext>
-                  </a:extLst>
-                </a:gridCol>
+                <a:gridCol w="562356"/>
+                <a:gridCol w="2024481"/>
+                <a:gridCol w="787298"/>
+                <a:gridCol w="3936491"/>
+                <a:gridCol w="3936491"/>
               </a:tblGrid>
               <a:tr h="342900">
                 <a:tc>
@@ -13198,7 +12879,7 @@
                         </a:defRPr>
                       </a:pPr>
                       <a:r>
-                        <a:t>Tỷ lệ</a:t>
+                        <a:t>Ratio</a:t>
                       </a:r>
                     </a:p>
                   </a:txBody>
@@ -13222,7 +12903,7 @@
                         </a:defRPr>
                       </a:pPr>
                       <a:r>
-                        <a:t>Mô tả</a:t>
+                        <a:t>Description</a:t>
                       </a:r>
                     </a:p>
                   </a:txBody>
@@ -13246,7 +12927,7 @@
                         </a:defRPr>
                       </a:pPr>
                       <a:r>
-                        <a:t>Mục đích</a:t>
+                        <a:t>Purpose</a:t>
                       </a:r>
                     </a:p>
                   </a:txBody>
@@ -13256,11 +12937,6 @@
                     </a:solidFill>
                   </a:tcPr>
                 </a:tc>
-                <a:extLst>
-                  <a:ext uri="{0D108BD9-81ED-4DB2-BD59-A6C34878D82A}">
-                    <a16:rowId xmlns:a16="http://schemas.microsoft.com/office/drawing/2014/main" val="10000"/>
-                  </a:ext>
-                </a:extLst>
               </a:tr>
               <a:tr h="342900">
                 <a:tc>
@@ -13349,7 +13025,7 @@
                         </a:defRPr>
                       </a:pPr>
                       <a:r>
-                        <a:t>8-16 từ ngẫu nhiên</a:t>
+                        <a:t>8-16 random words</a:t>
                       </a:r>
                     </a:p>
                   </a:txBody>
@@ -13373,7 +13049,7 @@
                         </a:defRPr>
                       </a:pPr>
                       <a:r>
-                        <a:t>Đa dạng từ vựng</a:t>
+                        <a:t>Vocabulary diversity</a:t>
                       </a:r>
                     </a:p>
                   </a:txBody>
@@ -13383,11 +13059,6 @@
                     </a:solidFill>
                   </a:tcPr>
                 </a:tc>
-                <a:extLst>
-                  <a:ext uri="{0D108BD9-81ED-4DB2-BD59-A6C34878D82A}">
-                    <a16:rowId xmlns:a16="http://schemas.microsoft.com/office/drawing/2014/main" val="10001"/>
-                  </a:ext>
-                </a:extLst>
               </a:tr>
               <a:tr h="342900">
                 <a:tc>
@@ -13476,7 +13147,7 @@
                         </a:defRPr>
                       </a:pPr>
                       <a:r>
-                        <a:t>2-4 cụm từ + dấu phẩy</a:t>
+                        <a:t>2-4 phrases + commas</a:t>
                       </a:r>
                     </a:p>
                   </a:txBody>
@@ -13500,7 +13171,7 @@
                         </a:defRPr>
                       </a:pPr>
                       <a:r>
-                        <a:t>Học cụm từ</a:t>
+                        <a:t>Phrase learning</a:t>
                       </a:r>
                     </a:p>
                   </a:txBody>
@@ -13510,11 +13181,6 @@
                     </a:solidFill>
                   </a:tcPr>
                 </a:tc>
-                <a:extLst>
-                  <a:ext uri="{0D108BD9-81ED-4DB2-BD59-A6C34878D82A}">
-                    <a16:rowId xmlns:a16="http://schemas.microsoft.com/office/drawing/2014/main" val="10002"/>
-                  </a:ext>
-                </a:extLst>
               </a:tr>
               <a:tr h="342900">
                 <a:tc>
@@ -13603,7 +13269,7 @@
                         </a:defRPr>
                       </a:pPr>
                       <a:r>
-                        <a:t>Cặp từ gần giống (dist=1)</a:t>
+                        <a:t>Near-identical pairs (dist=1)</a:t>
                       </a:r>
                     </a:p>
                   </a:txBody>
@@ -13627,7 +13293,7 @@
                         </a:defRPr>
                       </a:pPr>
                       <a:r>
-                        <a:t>Phân biệt dấu fine-grained</a:t>
+                        <a:t>Fine-grained discrimination</a:t>
                       </a:r>
                     </a:p>
                   </a:txBody>
@@ -13637,11 +13303,6 @@
                     </a:solidFill>
                   </a:tcPr>
                 </a:tc>
-                <a:extLst>
-                  <a:ext uri="{0D108BD9-81ED-4DB2-BD59-A6C34878D82A}">
-                    <a16:rowId xmlns:a16="http://schemas.microsoft.com/office/drawing/2014/main" val="10003"/>
-                  </a:ext>
-                </a:extLst>
               </a:tr>
               <a:tr h="342900">
                 <a:tc>
@@ -13730,7 +13391,7 @@
                         </a:defRPr>
                       </a:pPr>
                       <a:r>
-                        <a:t>Từ cùng nhóm dấu</a:t>
+                        <a:t>Same diacritic group</a:t>
                       </a:r>
                     </a:p>
                   </a:txBody>
@@ -13754,7 +13415,7 @@
                         </a:defRPr>
                       </a:pPr>
                       <a:r>
-                        <a:t>Tập trung nhóm ă, â, ê, ô, ơ, ư</a:t>
+                        <a:t>Focus on ă, â, ê, ô, ơ, ư</a:t>
                       </a:r>
                     </a:p>
                   </a:txBody>
@@ -13764,11 +13425,6 @@
                     </a:solidFill>
                   </a:tcPr>
                 </a:tc>
-                <a:extLst>
-                  <a:ext uri="{0D108BD9-81ED-4DB2-BD59-A6C34878D82A}">
-                    <a16:rowId xmlns:a16="http://schemas.microsoft.com/office/drawing/2014/main" val="10004"/>
-                  </a:ext>
-                </a:extLst>
               </a:tr>
               <a:tr h="342900">
                 <a:tc>
@@ -13857,7 +13513,7 @@
                         </a:defRPr>
                       </a:pPr>
                       <a:r>
-                        <a:t>Cụm từ + từ, 2 dòng</a:t>
+                        <a:t>Phrases + words, 2 lines</a:t>
                       </a:r>
                     </a:p>
                   </a:txBody>
@@ -13891,11 +13547,6 @@
                     </a:solidFill>
                   </a:tcPr>
                 </a:tc>
-                <a:extLst>
-                  <a:ext uri="{0D108BD9-81ED-4DB2-BD59-A6C34878D82A}">
-                    <a16:rowId xmlns:a16="http://schemas.microsoft.com/office/drawing/2014/main" val="10005"/>
-                  </a:ext>
-                </a:extLst>
               </a:tr>
               <a:tr h="342900">
                 <a:tc>
@@ -13984,7 +13635,7 @@
                         </a:defRPr>
                       </a:pPr>
                       <a:r>
-                        <a:t>Cụm từ + dấu chấm</a:t>
+                        <a:t>Phrases + periods</a:t>
                       </a:r>
                     </a:p>
                   </a:txBody>
@@ -14008,7 +13659,7 @@
                         </a:defRPr>
                       </a:pPr>
                       <a:r>
-                        <a:t>Câu phức tạp</a:t>
+                        <a:t>Complex sentences</a:t>
                       </a:r>
                     </a:p>
                   </a:txBody>
@@ -14018,11 +13669,6 @@
                     </a:solidFill>
                   </a:tcPr>
                 </a:tc>
-                <a:extLst>
-                  <a:ext uri="{0D108BD9-81ED-4DB2-BD59-A6C34878D82A}">
-                    <a16:rowId xmlns:a16="http://schemas.microsoft.com/office/drawing/2014/main" val="10006"/>
-                  </a:ext>
-                </a:extLst>
               </a:tr>
               <a:tr h="342900">
                 <a:tc>
@@ -14111,7 +13757,7 @@
                         </a:defRPr>
                       </a:pPr>
                       <a:r>
-                        <a:t>Trộn có dấu + không dấu</a:t>
+                        <a:t>Mixed with/without diacritics</a:t>
                       </a:r>
                     </a:p>
                   </a:txBody>
@@ -14145,11 +13791,6 @@
                     </a:solidFill>
                   </a:tcPr>
                 </a:tc>
-                <a:extLst>
-                  <a:ext uri="{0D108BD9-81ED-4DB2-BD59-A6C34878D82A}">
-                    <a16:rowId xmlns:a16="http://schemas.microsoft.com/office/drawing/2014/main" val="10007"/>
-                  </a:ext>
-                </a:extLst>
               </a:tr>
             </a:tbl>
           </a:graphicData>
@@ -14197,7 +13838,6 @@
           <a:lstStyle/>
           <a:p>
             <a:pPr algn="ctr"/>
-            <a:endParaRPr/>
           </a:p>
         </p:txBody>
       </p:sp>
@@ -14232,7 +13872,7 @@
               </a:defRPr>
             </a:pPr>
             <a:r>
-              <a:t>⚠️  Anti-bias Strategy: gen_plain_words (10%) + 30% strip diacritics (Stage 2) → Dạy model KHÔNG tự thêm dấu vào text không dấu (ngăn hallucination). Đo lường bằng False Positive Rate.</a:t>
+              <a:t>⚠️  Anti-bias Strategy: gen_plain_words (10%) + 30% strip diacritics (Stage 2) → Teach the model NOT to add diacritics to plain text (prevent hallucination). Measured via False Positive Rate.</a:t>
             </a:r>
           </a:p>
         </p:txBody>
@@ -14279,7 +13919,6 @@
           <a:lstStyle/>
           <a:p>
             <a:pPr algn="ctr"/>
-            <a:endParaRPr/>
           </a:p>
         </p:txBody>
       </p:sp>
@@ -14314,7 +13953,7 @@
               </a:defRPr>
             </a:pPr>
             <a:r>
-              <a:t>Confusion Pairs — ví dụ:</a:t>
+              <a:t>Confusion Pairs — examples:</a:t>
             </a:r>
           </a:p>
         </p:txBody>
@@ -14350,11 +13989,11 @@
               </a:defRPr>
             </a:pPr>
             <a:r>
-              <a:t>chuồng ↔ chuộng  |  lặng ↔ lẫm  |  hổ ↔ hỗ  |  ngã ↔ ngả  |  mật ↔ mịt</a:t>
+              <a:t>chuồng ↔ chuồng  |  lặng ↔ lẫm  |  hổ ↔ hỗ  |  ngã ↔ ngả  |  mật ↔ mịt</a:t>
             </a:r>
             <a:br/>
             <a:r>
-              <a:t>→ Tối đa 5.000 cặp (edit distance = 1), giúp model phân biệt fine-grained</a:t>
+              <a:t>→ Up to 5,000 pairs (edit distance = 1) for fine-grained discrimination</a:t>
             </a:r>
           </a:p>
         </p:txBody>
@@ -14404,7 +14043,7 @@
 </file>
 
 <file path=ppt/slides/slide9.xml><?xml version="1.0" encoding="utf-8"?>
-<p:sld xmlns:a="http://schemas.openxmlformats.org/drawingml/2006/main" xmlns:r="http://schemas.openxmlformats.org/officeDocument/2006/relationships" xmlns:p="http://schemas.openxmlformats.org/presentationml/2006/main">
+<p:sld xmlns:a="http://schemas.openxmlformats.org/drawingml/2006/main" xmlns:p="http://schemas.openxmlformats.org/presentationml/2006/main" xmlns:r="http://schemas.openxmlformats.org/officeDocument/2006/relationships">
   <p:cSld>
     <p:bg>
       <p:bgPr>
@@ -14420,14 +14059,7 @@
         <p:cNvGrpSpPr/>
         <p:nvPr/>
       </p:nvGrpSpPr>
-      <p:grpSpPr>
-        <a:xfrm>
-          <a:off x="0" y="0"/>
-          <a:ext cx="0" cy="0"/>
-          <a:chOff x="0" y="0"/>
-          <a:chExt cx="0" cy="0"/>
-        </a:xfrm>
-      </p:grpSpPr>
+      <p:grpSpPr/>
       <p:sp>
         <p:nvSpPr>
           <p:cNvPr id="2" name="Rectangle 1"/>
@@ -14468,7 +14100,6 @@
           <a:lstStyle/>
           <a:p>
             <a:pPr algn="ctr"/>
-            <a:endParaRPr/>
           </a:p>
         </p:txBody>
       </p:sp>
@@ -14503,7 +14134,7 @@
               </a:defRPr>
             </a:pPr>
             <a:r>
-              <a:t>DATA AUGMENTATION — 14 LOẠI</a:t>
+              <a:t>DATA AUGMENTATION — 14 TYPES</a:t>
             </a:r>
           </a:p>
         </p:txBody>
@@ -14527,48 +14158,12 @@
                 <a:tableStyleId>{5C22544A-7EE6-4342-B048-85BDC9FD1C3A}</a:tableStyleId>
               </a:tblPr>
               <a:tblGrid>
-                <a:gridCol w="1574596">
-                  <a:extLst>
-                    <a:ext uri="{9D8B030D-6E8A-4147-A177-3AD203B41FA5}">
-                      <a16:colId xmlns:a16="http://schemas.microsoft.com/office/drawing/2014/main" val="20000"/>
-                    </a:ext>
-                  </a:extLst>
-                </a:gridCol>
-                <a:gridCol w="1124712">
-                  <a:extLst>
-                    <a:ext uri="{9D8B030D-6E8A-4147-A177-3AD203B41FA5}">
-                      <a16:colId xmlns:a16="http://schemas.microsoft.com/office/drawing/2014/main" val="20001"/>
-                    </a:ext>
-                  </a:extLst>
-                </a:gridCol>
-                <a:gridCol w="1124712">
-                  <a:extLst>
-                    <a:ext uri="{9D8B030D-6E8A-4147-A177-3AD203B41FA5}">
-                      <a16:colId xmlns:a16="http://schemas.microsoft.com/office/drawing/2014/main" val="20002"/>
-                    </a:ext>
-                  </a:extLst>
-                </a:gridCol>
-                <a:gridCol w="1574596">
-                  <a:extLst>
-                    <a:ext uri="{9D8B030D-6E8A-4147-A177-3AD203B41FA5}">
-                      <a16:colId xmlns:a16="http://schemas.microsoft.com/office/drawing/2014/main" val="20003"/>
-                    </a:ext>
-                  </a:extLst>
-                </a:gridCol>
-                <a:gridCol w="1124712">
-                  <a:extLst>
-                    <a:ext uri="{9D8B030D-6E8A-4147-A177-3AD203B41FA5}">
-                      <a16:colId xmlns:a16="http://schemas.microsoft.com/office/drawing/2014/main" val="20004"/>
-                    </a:ext>
-                  </a:extLst>
-                </a:gridCol>
-                <a:gridCol w="1124712">
-                  <a:extLst>
-                    <a:ext uri="{9D8B030D-6E8A-4147-A177-3AD203B41FA5}">
-                      <a16:colId xmlns:a16="http://schemas.microsoft.com/office/drawing/2014/main" val="20005"/>
-                    </a:ext>
-                  </a:extLst>
-                </a:gridCol>
+                <a:gridCol w="1574596"/>
+                <a:gridCol w="1124712"/>
+                <a:gridCol w="1124712"/>
+                <a:gridCol w="1574596"/>
+                <a:gridCol w="1124712"/>
+                <a:gridCol w="1124712"/>
               </a:tblGrid>
               <a:tr h="548640">
                 <a:tc>
@@ -14585,7 +14180,7 @@
                         </a:defRPr>
                       </a:pPr>
                       <a:r>
-                        <a:t>Loại</a:t>
+                        <a:t>Type</a:t>
                       </a:r>
                     </a:p>
                   </a:txBody>
@@ -14609,7 +14204,7 @@
                         </a:defRPr>
                       </a:pPr>
                       <a:r>
-                        <a:t>Thông số</a:t>
+                        <a:t>Params</a:t>
                       </a:r>
                     </a:p>
                   </a:txBody>
@@ -14633,7 +14228,7 @@
                         </a:defRPr>
                       </a:pPr>
                       <a:r>
-                        <a:t>Mô phỏng</a:t>
+                        <a:t>Simulates</a:t>
                       </a:r>
                     </a:p>
                   </a:txBody>
@@ -14657,7 +14252,7 @@
                         </a:defRPr>
                       </a:pPr>
                       <a:r>
-                        <a:t>Loại</a:t>
+                        <a:t>Type</a:t>
                       </a:r>
                     </a:p>
                   </a:txBody>
@@ -14681,7 +14276,7 @@
                         </a:defRPr>
                       </a:pPr>
                       <a:r>
-                        <a:t>Thông số</a:t>
+                        <a:t>Params</a:t>
                       </a:r>
                     </a:p>
                   </a:txBody>
@@ -14705,7 +14300,7 @@
                         </a:defRPr>
                       </a:pPr>
                       <a:r>
-                        <a:t>Mô phỏng</a:t>
+                        <a:t>Simulates</a:t>
                       </a:r>
                     </a:p>
                   </a:txBody>
@@ -14715,11 +14310,6 @@
                     </a:solidFill>
                   </a:tcPr>
                 </a:tc>
-                <a:extLst>
-                  <a:ext uri="{0D108BD9-81ED-4DB2-BD59-A6C34878D82A}">
-                    <a16:rowId xmlns:a16="http://schemas.microsoft.com/office/drawing/2014/main" val="10000"/>
-                  </a:ext>
-                </a:extLst>
               </a:tr>
               <a:tr h="548640">
                 <a:tc>
@@ -14784,7 +14374,7 @@
                         </a:defRPr>
                       </a:pPr>
                       <a:r>
-                        <a:t>Mờ camera</a:t>
+                        <a:t>Camera blur</a:t>
                       </a:r>
                     </a:p>
                   </a:txBody>
@@ -14832,7 +14422,7 @@
                         </a:defRPr>
                       </a:pPr>
                       <a:r>
-                        <a:t>5 hướng</a:t>
+                        <a:t>5 directions</a:t>
                       </a:r>
                     </a:p>
                   </a:txBody>
@@ -14856,7 +14446,7 @@
                         </a:defRPr>
                       </a:pPr>
                       <a:r>
-                        <a:t>Bóng đổ</a:t>
+                        <a:t>Drop shadow</a:t>
                       </a:r>
                     </a:p>
                   </a:txBody>
@@ -14866,11 +14456,6 @@
                     </a:solidFill>
                   </a:tcPr>
                 </a:tc>
-                <a:extLst>
-                  <a:ext uri="{0D108BD9-81ED-4DB2-BD59-A6C34878D82A}">
-                    <a16:rowId xmlns:a16="http://schemas.microsoft.com/office/drawing/2014/main" val="10001"/>
-                  </a:ext>
-                </a:extLst>
               </a:tr>
               <a:tr h="548640">
                 <a:tc>
@@ -14935,7 +14520,7 @@
                         </a:defRPr>
                       </a:pPr>
                       <a:r>
-                        <a:t>Nhiễu ảnh</a:t>
+                        <a:t>Image noise</a:t>
                       </a:r>
                     </a:p>
                   </a:txBody>
@@ -14983,7 +14568,7 @@
                         </a:defRPr>
                       </a:pPr>
                       <a:r>
-                        <a:t>Vùng sáng</a:t>
+                        <a:t>Bright overlay</a:t>
                       </a:r>
                     </a:p>
                   </a:txBody>
@@ -15007,7 +14592,7 @@
                         </a:defRPr>
                       </a:pPr>
                       <a:r>
-                        <a:t>Chói sáng</a:t>
+                        <a:t>Overexposure</a:t>
                       </a:r>
                     </a:p>
                   </a:txBody>
@@ -15017,11 +14602,6 @@
                     </a:solidFill>
                   </a:tcPr>
                 </a:tc>
-                <a:extLst>
-                  <a:ext uri="{0D108BD9-81ED-4DB2-BD59-A6C34878D82A}">
-                    <a16:rowId xmlns:a16="http://schemas.microsoft.com/office/drawing/2014/main" val="10002"/>
-                  </a:ext>
-                </a:extLst>
               </a:tr>
               <a:tr h="548640">
                 <a:tc>
@@ -15038,7 +14618,7 @@
                         </a:defRPr>
                       </a:pPr>
                       <a:r>
-                        <a:t>Contrast Up</a:t>
+                        <a:t>Contrast ↑</a:t>
                       </a:r>
                     </a:p>
                   </a:txBody>
@@ -15086,7 +14666,7 @@
                         </a:defRPr>
                       </a:pPr>
                       <a:r>
-                        <a:t>Sáng</a:t>
+                        <a:t>Bright scene</a:t>
                       </a:r>
                     </a:p>
                   </a:txBody>
@@ -15158,7 +14738,7 @@
                         </a:defRPr>
                       </a:pPr>
                       <a:r>
-                        <a:t>Méo góc</a:t>
+                        <a:t>Angle warp</a:t>
                       </a:r>
                     </a:p>
                   </a:txBody>
@@ -15168,11 +14748,6 @@
                     </a:solidFill>
                   </a:tcPr>
                 </a:tc>
-                <a:extLst>
-                  <a:ext uri="{0D108BD9-81ED-4DB2-BD59-A6C34878D82A}">
-                    <a16:rowId xmlns:a16="http://schemas.microsoft.com/office/drawing/2014/main" val="10003"/>
-                  </a:ext>
-                </a:extLst>
               </a:tr>
               <a:tr h="548640">
                 <a:tc>
@@ -15189,7 +14764,7 @@
                         </a:defRPr>
                       </a:pPr>
                       <a:r>
-                        <a:t>Contrast Down</a:t>
+                        <a:t>Contrast ↓</a:t>
                       </a:r>
                     </a:p>
                   </a:txBody>
@@ -15237,7 +14812,7 @@
                         </a:defRPr>
                       </a:pPr>
                       <a:r>
-                        <a:t>Tối</a:t>
+                        <a:t>Dark scene</a:t>
                       </a:r>
                     </a:p>
                   </a:txBody>
@@ -15309,7 +14884,7 @@
                         </a:defRPr>
                       </a:pPr>
                       <a:r>
-                        <a:t>Phân giải thấp</a:t>
+                        <a:t>Low resolution</a:t>
                       </a:r>
                     </a:p>
                   </a:txBody>
@@ -15319,11 +14894,6 @@
                     </a:solidFill>
                   </a:tcPr>
                 </a:tc>
-                <a:extLst>
-                  <a:ext uri="{0D108BD9-81ED-4DB2-BD59-A6C34878D82A}">
-                    <a16:rowId xmlns:a16="http://schemas.microsoft.com/office/drawing/2014/main" val="10004"/>
-                  </a:ext>
-                </a:extLst>
               </a:tr>
               <a:tr h="548640">
                 <a:tc>
@@ -15388,7 +14958,7 @@
                         </a:defRPr>
                       </a:pPr>
                       <a:r>
-                        <a:t>Nén ảnh</a:t>
+                        <a:t>Compression</a:t>
                       </a:r>
                     </a:p>
                   </a:txBody>
@@ -15460,7 +15030,7 @@
                         </a:defRPr>
                       </a:pPr>
                       <a:r>
-                        <a:t>Trang cong</a:t>
+                        <a:t>Curved page</a:t>
                       </a:r>
                     </a:p>
                   </a:txBody>
@@ -15470,11 +15040,6 @@
                     </a:solidFill>
                   </a:tcPr>
                 </a:tc>
-                <a:extLst>
-                  <a:ext uri="{0D108BD9-81ED-4DB2-BD59-A6C34878D82A}">
-                    <a16:rowId xmlns:a16="http://schemas.microsoft.com/office/drawing/2014/main" val="10005"/>
-                  </a:ext>
-                </a:extLst>
               </a:tr>
               <a:tr h="548640">
                 <a:tc>
@@ -15539,7 +15104,7 @@
                         </a:defRPr>
                       </a:pPr>
                       <a:r>
-                        <a:t>Scan nghiêng</a:t>
+                        <a:t>Tilted scan</a:t>
                       </a:r>
                     </a:p>
                   </a:txBody>
@@ -15611,7 +15176,7 @@
                         </a:defRPr>
                       </a:pPr>
                       <a:r>
-                        <a:t>Biến dạng</a:t>
+                        <a:t>Deformation</a:t>
                       </a:r>
                     </a:p>
                   </a:txBody>
@@ -15621,11 +15186,6 @@
                     </a:solidFill>
                   </a:tcPr>
                 </a:tc>
-                <a:extLst>
-                  <a:ext uri="{0D108BD9-81ED-4DB2-BD59-A6C34878D82A}">
-                    <a16:rowId xmlns:a16="http://schemas.microsoft.com/office/drawing/2014/main" val="10006"/>
-                  </a:ext>
-                </a:extLst>
               </a:tr>
               <a:tr h="548640">
                 <a:tc>
@@ -15690,7 +15250,7 @@
                         </a:defRPr>
                       </a:pPr>
                       <a:r>
-                        <a:t>Mờ chuyển động</a:t>
+                        <a:t>Motion blur</a:t>
                       </a:r>
                     </a:p>
                   </a:txBody>
@@ -15762,7 +15322,7 @@
                         </a:defRPr>
                       </a:pPr>
                       <a:r>
-                        <a:t>Lấy nét sai</a:t>
+                        <a:t>Focus blur</a:t>
                       </a:r>
                     </a:p>
                   </a:txBody>
@@ -15772,11 +15332,6 @@
                     </a:solidFill>
                   </a:tcPr>
                 </a:tc>
-                <a:extLst>
-                  <a:ext uri="{0D108BD9-81ED-4DB2-BD59-A6C34878D82A}">
-                    <a16:rowId xmlns:a16="http://schemas.microsoft.com/office/drawing/2014/main" val="10007"/>
-                  </a:ext>
-                </a:extLst>
               </a:tr>
             </a:tbl>
           </a:graphicData>
@@ -15824,7 +15379,6 @@
           <a:lstStyle/>
           <a:p>
             <a:pPr algn="ctr"/>
-            <a:endParaRPr/>
           </a:p>
         </p:txBody>
       </p:sp>
@@ -15859,7 +15413,7 @@
               </a:defRPr>
             </a:pPr>
             <a:r>
-              <a:t>📊 Phân phối: 40% không augmentation (học dấu sạch) + 60% augmentation ngẫu nhiên (tăng robustness). Stage 2 chỉ dùng 4 loại nhẹ: blur, noise, jpeg, rotate.</a:t>
+              <a:t>📊 Distribution: 40% no augmentation (clean diacritical learning) + 60% random augmentation (robustness). Stage 2 uses only 4 lighter types: blur, noise, jpeg, rotate.</a:t>
             </a:r>
           </a:p>
         </p:txBody>
